--- a/slides/0016-naive-bayes-for-sentiment.pptx
+++ b/slides/0016-naive-bayes-for-sentiment.pptx
@@ -5,7 +5,7 @@
     <p:sldMasterId id="2147483648" r:id="rId1"/>
   </p:sldMasterIdLst>
   <p:notesMasterIdLst>
-    <p:notesMasterId r:id="rId16"/>
+    <p:notesMasterId r:id="rId20"/>
   </p:notesMasterIdLst>
   <p:sldIdLst>
     <p:sldId id="256" r:id="rId2"/>
@@ -22,6 +22,10 @@
     <p:sldId id="267" r:id="rId13"/>
     <p:sldId id="268" r:id="rId14"/>
     <p:sldId id="269" r:id="rId15"/>
+    <p:sldId id="270" r:id="rId16"/>
+    <p:sldId id="271" r:id="rId17"/>
+    <p:sldId id="272" r:id="rId18"/>
+    <p:sldId id="273" r:id="rId19"/>
   </p:sldIdLst>
   <p:sldSz cx="12192000" cy="6858000"/>
   <p:notesSz cx="6858000" cy="12192000"/>
@@ -150,7 +154,7 @@
     </p:spTree>
     <p:extLst>
       <p:ext uri="{BB962C8B-B14F-4D97-AF65-F5344CB8AC3E}">
-        <p14:creationId xmlns:p14="http://schemas.microsoft.com/office/powerpoint/2010/main" val="1060589528"/>
+        <p14:creationId xmlns:p14="http://schemas.microsoft.com/office/powerpoint/2010/main" val="1226195958"/>
       </p:ext>
     </p:extLst>
   </p:cSld>
@@ -1855,6 +1859,478 @@
     <p:bg>
       <p:bgPr>
         <a:solidFill>
+          <a:srgbClr val="F4F6FB"/>
+        </a:solidFill>
+        <a:effectLst/>
+      </p:bgPr>
+    </p:bg>
+    <p:spTree>
+      <p:nvGrpSpPr>
+        <p:cNvPr id="1" name=""/>
+        <p:cNvGrpSpPr/>
+        <p:nvPr/>
+      </p:nvGrpSpPr>
+      <p:grpSpPr>
+        <a:xfrm>
+          <a:off x="0" y="0"/>
+          <a:ext cx="0" cy="0"/>
+          <a:chOff x="0" y="0"/>
+          <a:chExt cx="0" cy="0"/>
+        </a:xfrm>
+      </p:grpSpPr>
+      <p:sp>
+        <p:nvSpPr>
+          <p:cNvPr id="2" name="Text 0"/>
+          <p:cNvSpPr txBox="1"/>
+          <p:nvPr/>
+        </p:nvSpPr>
+        <p:spPr>
+          <a:xfrm>
+            <a:off x="731520" y="502920"/>
+            <a:ext cx="10698480" cy="731520"/>
+          </a:xfrm>
+          <a:prstGeom prst="rect">
+            <a:avLst/>
+          </a:prstGeom>
+          <a:noFill/>
+          <a:ln/>
+        </p:spPr>
+        <p:txBody>
+          <a:bodyPr wrap="square" lIns="0" tIns="0" rIns="0" bIns="0" rtlCol="0" anchor="ctr"/>
+          <a:lstStyle/>
+          <a:p>
+            <a:pPr marL="0" indent="0">
+              <a:buNone/>
+            </a:pPr>
+            <a:r>
+              <a:rPr lang="en-US" sz="3400" b="1" dirty="0">
+                <a:solidFill>
+                  <a:srgbClr val="1B2A4A"/>
+                </a:solidFill>
+                <a:latin typeface="Cambria" pitchFamily="34" charset="0"/>
+                <a:ea typeface="Cambria" pitchFamily="34" charset="-122"/>
+                <a:cs typeface="Cambria" pitchFamily="34" charset="-120"/>
+              </a:rPr>
+              <a:t>A problem with real reviews</a:t>
+            </a:r>
+            <a:endParaRPr lang="en-US" sz="3400" dirty="0"/>
+          </a:p>
+        </p:txBody>
+      </p:sp>
+      <p:sp>
+        <p:nvSpPr>
+          <p:cNvPr id="3" name="Text 1"/>
+          <p:cNvSpPr txBox="1"/>
+          <p:nvPr/>
+        </p:nvSpPr>
+        <p:spPr>
+          <a:xfrm>
+            <a:off x="731520" y="1280160"/>
+            <a:ext cx="10698480" cy="457200"/>
+          </a:xfrm>
+          <a:prstGeom prst="rect">
+            <a:avLst/>
+          </a:prstGeom>
+          <a:noFill/>
+          <a:ln/>
+        </p:spPr>
+        <p:txBody>
+          <a:bodyPr wrap="square" lIns="0" tIns="0" rIns="0" bIns="0" rtlCol="0" anchor="ctr"/>
+          <a:lstStyle/>
+          <a:p>
+            <a:pPr marL="0" indent="0">
+              <a:buNone/>
+            </a:pPr>
+            <a:r>
+              <a:rPr lang="en-US" sz="1700" dirty="0">
+                <a:solidFill>
+                  <a:srgbClr val="5B667A"/>
+                </a:solidFill>
+                <a:latin typeface="Calibri" pitchFamily="34" charset="0"/>
+                <a:ea typeface="Calibri" pitchFamily="34" charset="-122"/>
+                <a:cs typeface="Calibri" pitchFamily="34" charset="-120"/>
+              </a:rPr>
+              <a:t>Our review had 3 words. A real one has hundreds — and every word multiplies in another number below 1.</a:t>
+            </a:r>
+            <a:endParaRPr lang="en-US" sz="1700" dirty="0"/>
+          </a:p>
+        </p:txBody>
+      </p:sp>
+      <p:sp>
+        <p:nvSpPr>
+          <p:cNvPr id="4" name="Shape 2"/>
+          <p:cNvSpPr/>
+          <p:nvPr/>
+        </p:nvSpPr>
+        <p:spPr>
+          <a:xfrm>
+            <a:off x="731520" y="2011680"/>
+            <a:ext cx="10698480" cy="1234440"/>
+          </a:xfrm>
+          <a:prstGeom prst="roundRect">
+            <a:avLst>
+              <a:gd name="adj" fmla="val 8889"/>
+            </a:avLst>
+          </a:prstGeom>
+          <a:solidFill>
+            <a:srgbClr val="FFFFFF"/>
+          </a:solidFill>
+          <a:ln/>
+          <a:effectLst>
+            <a:outerShdw blurRad="76200" dist="25400" dir="5400000" algn="bl" rotWithShape="0">
+              <a:srgbClr val="9AA6BC">
+                <a:alpha val="50000"/>
+              </a:srgbClr>
+            </a:outerShdw>
+          </a:effectLst>
+        </p:spPr>
+        <p:txBody>
+          <a:bodyPr/>
+          <a:lstStyle/>
+          <a:p>
+            <a:endParaRPr lang="en-US"/>
+          </a:p>
+        </p:txBody>
+      </p:sp>
+      <p:sp>
+        <p:nvSpPr>
+          <p:cNvPr id="5" name="Text 3"/>
+          <p:cNvSpPr txBox="1"/>
+          <p:nvPr/>
+        </p:nvSpPr>
+        <p:spPr>
+          <a:xfrm>
+            <a:off x="1005840" y="2011680"/>
+            <a:ext cx="10149840" cy="1234440"/>
+          </a:xfrm>
+          <a:prstGeom prst="rect">
+            <a:avLst/>
+          </a:prstGeom>
+          <a:noFill/>
+          <a:ln/>
+        </p:spPr>
+        <p:txBody>
+          <a:bodyPr wrap="square" lIns="0" tIns="0" rIns="0" bIns="0" rtlCol="0" anchor="ctr"/>
+          <a:lstStyle/>
+          <a:p>
+            <a:pPr marL="0" indent="0">
+              <a:buNone/>
+            </a:pPr>
+            <a:r>
+              <a:rPr lang="en-US" sz="2000" b="1" dirty="0">
+                <a:solidFill>
+                  <a:srgbClr val="1B2A4A"/>
+                </a:solidFill>
+                <a:latin typeface="Calibri" pitchFamily="34" charset="0"/>
+                <a:ea typeface="Calibri" pitchFamily="34" charset="-122"/>
+                <a:cs typeface="Calibri" pitchFamily="34" charset="-120"/>
+              </a:rPr>
+              <a:t>0.2 </a:t>
+            </a:r>
+            <a:r>
+              <a:rPr lang="en-US" sz="1800" dirty="0">
+                <a:solidFill>
+                  <a:srgbClr val="5B667A"/>
+                </a:solidFill>
+                <a:latin typeface="Calibri" pitchFamily="34" charset="0"/>
+                <a:ea typeface="Calibri" pitchFamily="34" charset="-122"/>
+                <a:cs typeface="Calibri" pitchFamily="34" charset="-120"/>
+              </a:rPr>
+              <a:t>×</a:t>
+            </a:r>
+            <a:r>
+              <a:rPr lang="en-US" sz="2000" b="1" dirty="0">
+                <a:solidFill>
+                  <a:srgbClr val="1B2A4A"/>
+                </a:solidFill>
+                <a:latin typeface="Calibri" pitchFamily="34" charset="0"/>
+                <a:ea typeface="Calibri" pitchFamily="34" charset="-122"/>
+                <a:cs typeface="Calibri" pitchFamily="34" charset="-120"/>
+              </a:rPr>
+              <a:t> 0.15 </a:t>
+            </a:r>
+            <a:r>
+              <a:rPr lang="en-US" sz="1800" dirty="0">
+                <a:solidFill>
+                  <a:srgbClr val="5B667A"/>
+                </a:solidFill>
+                <a:latin typeface="Calibri" pitchFamily="34" charset="0"/>
+                <a:ea typeface="Calibri" pitchFamily="34" charset="-122"/>
+                <a:cs typeface="Calibri" pitchFamily="34" charset="-120"/>
+              </a:rPr>
+              <a:t>×</a:t>
+            </a:r>
+            <a:r>
+              <a:rPr lang="en-US" sz="2000" b="1" dirty="0">
+                <a:solidFill>
+                  <a:srgbClr val="1B2A4A"/>
+                </a:solidFill>
+                <a:latin typeface="Calibri" pitchFamily="34" charset="0"/>
+                <a:ea typeface="Calibri" pitchFamily="34" charset="-122"/>
+                <a:cs typeface="Calibri" pitchFamily="34" charset="-120"/>
+              </a:rPr>
+              <a:t> 0.06 </a:t>
+            </a:r>
+            <a:r>
+              <a:rPr lang="en-US" sz="1800" dirty="0">
+                <a:solidFill>
+                  <a:srgbClr val="5B667A"/>
+                </a:solidFill>
+                <a:latin typeface="Calibri" pitchFamily="34" charset="0"/>
+                <a:ea typeface="Calibri" pitchFamily="34" charset="-122"/>
+                <a:cs typeface="Calibri" pitchFamily="34" charset="-120"/>
+              </a:rPr>
+              <a:t>×</a:t>
+            </a:r>
+            <a:r>
+              <a:rPr lang="en-US" sz="2000" b="1" dirty="0">
+                <a:solidFill>
+                  <a:srgbClr val="1B2A4A"/>
+                </a:solidFill>
+                <a:latin typeface="Calibri" pitchFamily="34" charset="0"/>
+                <a:ea typeface="Calibri" pitchFamily="34" charset="-122"/>
+                <a:cs typeface="Calibri" pitchFamily="34" charset="-120"/>
+              </a:rPr>
+              <a:t> 0.2 </a:t>
+            </a:r>
+            <a:r>
+              <a:rPr lang="en-US" sz="1800" dirty="0">
+                <a:solidFill>
+                  <a:srgbClr val="5B667A"/>
+                </a:solidFill>
+                <a:latin typeface="Calibri" pitchFamily="34" charset="0"/>
+                <a:ea typeface="Calibri" pitchFamily="34" charset="-122"/>
+                <a:cs typeface="Calibri" pitchFamily="34" charset="-120"/>
+              </a:rPr>
+              <a:t>× … × </a:t>
+            </a:r>
+            <a:r>
+              <a:rPr lang="en-US" sz="2000" b="1" dirty="0">
+                <a:solidFill>
+                  <a:srgbClr val="1B2A4A"/>
+                </a:solidFill>
+                <a:latin typeface="Calibri" pitchFamily="34" charset="0"/>
+                <a:ea typeface="Calibri" pitchFamily="34" charset="-122"/>
+                <a:cs typeface="Calibri" pitchFamily="34" charset="-120"/>
+              </a:rPr>
+              <a:t> 0.1</a:t>
+            </a:r>
+            <a:r>
+              <a:rPr lang="en-US" sz="1500" i="1" dirty="0">
+                <a:solidFill>
+                  <a:srgbClr val="5B667A"/>
+                </a:solidFill>
+                <a:latin typeface="Calibri" pitchFamily="34" charset="0"/>
+                <a:ea typeface="Calibri" pitchFamily="34" charset="-122"/>
+                <a:cs typeface="Calibri" pitchFamily="34" charset="-120"/>
+              </a:rPr>
+              <a:t>      the product keeps shrinking, fast</a:t>
+            </a:r>
+            <a:endParaRPr lang="en-US" sz="2000" dirty="0"/>
+          </a:p>
+        </p:txBody>
+      </p:sp>
+      <p:sp>
+        <p:nvSpPr>
+          <p:cNvPr id="6" name="Shape 4"/>
+          <p:cNvSpPr/>
+          <p:nvPr/>
+        </p:nvSpPr>
+        <p:spPr>
+          <a:xfrm>
+            <a:off x="731520" y="3520440"/>
+            <a:ext cx="10698480" cy="1691640"/>
+          </a:xfrm>
+          <a:prstGeom prst="roundRect">
+            <a:avLst>
+              <a:gd name="adj" fmla="val 6486"/>
+            </a:avLst>
+          </a:prstGeom>
+          <a:solidFill>
+            <a:srgbClr val="C0453B"/>
+          </a:solidFill>
+          <a:ln/>
+        </p:spPr>
+        <p:txBody>
+          <a:bodyPr/>
+          <a:lstStyle/>
+          <a:p>
+            <a:endParaRPr lang="en-US"/>
+          </a:p>
+        </p:txBody>
+      </p:sp>
+      <p:sp>
+        <p:nvSpPr>
+          <p:cNvPr id="7" name="Text 5"/>
+          <p:cNvSpPr txBox="1"/>
+          <p:nvPr/>
+        </p:nvSpPr>
+        <p:spPr>
+          <a:xfrm>
+            <a:off x="1051560" y="3520440"/>
+            <a:ext cx="10241280" cy="1691640"/>
+          </a:xfrm>
+          <a:prstGeom prst="rect">
+            <a:avLst/>
+          </a:prstGeom>
+          <a:noFill/>
+          <a:ln/>
+        </p:spPr>
+        <p:txBody>
+          <a:bodyPr wrap="square" lIns="0" tIns="0" rIns="0" bIns="0" rtlCol="0" anchor="ctr"/>
+          <a:lstStyle/>
+          <a:p>
+            <a:pPr marL="0" indent="0">
+              <a:lnSpc>
+                <a:spcPct val="120000"/>
+              </a:lnSpc>
+              <a:buNone/>
+            </a:pPr>
+            <a:r>
+              <a:rPr lang="en-US" sz="1800" dirty="0">
+                <a:solidFill>
+                  <a:srgbClr val="FFFFFF"/>
+                </a:solidFill>
+                <a:latin typeface="Calibri" pitchFamily="34" charset="0"/>
+                <a:ea typeface="Calibri" pitchFamily="34" charset="-122"/>
+                <a:cs typeface="Calibri" pitchFamily="34" charset="-120"/>
+              </a:rPr>
+              <a:t>Multiply ~300 small probabilities and you reach about </a:t>
+            </a:r>
+            <a:r>
+              <a:rPr lang="en-US" sz="1800" b="1" dirty="0">
+                <a:solidFill>
+                  <a:srgbClr val="FFFFFF"/>
+                </a:solidFill>
+                <a:latin typeface="Calibri" pitchFamily="34" charset="0"/>
+                <a:ea typeface="Calibri" pitchFamily="34" charset="-122"/>
+                <a:cs typeface="Calibri" pitchFamily="34" charset="-120"/>
+              </a:rPr>
+              <a:t>10</a:t>
+            </a:r>
+            <a:r>
+              <a:rPr lang="en-US" sz="1400" b="1" dirty="0">
+                <a:solidFill>
+                  <a:srgbClr val="FFFFFF"/>
+                </a:solidFill>
+                <a:latin typeface="Calibri" pitchFamily="34" charset="0"/>
+                <a:ea typeface="Calibri" pitchFamily="34" charset="-122"/>
+                <a:cs typeface="Calibri" pitchFamily="34" charset="-120"/>
+              </a:rPr>
+              <a:t>⁻⁹⁰⁰</a:t>
+            </a:r>
+            <a:r>
+              <a:rPr lang="en-US" sz="1800" dirty="0">
+                <a:solidFill>
+                  <a:srgbClr val="FFFFFF"/>
+                </a:solidFill>
+                <a:latin typeface="Calibri" pitchFamily="34" charset="0"/>
+                <a:ea typeface="Calibri" pitchFamily="34" charset="-122"/>
+                <a:cs typeface="Calibri" pitchFamily="34" charset="-120"/>
+              </a:rPr>
+              <a:t>  —  smaller than the tiniest number a computer can hold (~10</a:t>
+            </a:r>
+            <a:r>
+              <a:rPr lang="en-US" sz="1400" b="1" dirty="0">
+                <a:solidFill>
+                  <a:srgbClr val="FFFFFF"/>
+                </a:solidFill>
+                <a:latin typeface="Calibri" pitchFamily="34" charset="0"/>
+                <a:ea typeface="Calibri" pitchFamily="34" charset="-122"/>
+                <a:cs typeface="Calibri" pitchFamily="34" charset="-120"/>
+              </a:rPr>
+              <a:t>⁻³⁰⁸</a:t>
+            </a:r>
+            <a:r>
+              <a:rPr lang="en-US" sz="1800" dirty="0">
+                <a:solidFill>
+                  <a:srgbClr val="FFFFFF"/>
+                </a:solidFill>
+                <a:latin typeface="Calibri" pitchFamily="34" charset="0"/>
+                <a:ea typeface="Calibri" pitchFamily="34" charset="-122"/>
+                <a:cs typeface="Calibri" pitchFamily="34" charset="-120"/>
+              </a:rPr>
+              <a:t>).  It silently rounds to </a:t>
+            </a:r>
+            <a:r>
+              <a:rPr lang="en-US" sz="2200" b="1" dirty="0">
+                <a:solidFill>
+                  <a:srgbClr val="FFFFFF"/>
+                </a:solidFill>
+                <a:latin typeface="Calibri" pitchFamily="34" charset="0"/>
+                <a:ea typeface="Calibri" pitchFamily="34" charset="-122"/>
+                <a:cs typeface="Calibri" pitchFamily="34" charset="-120"/>
+              </a:rPr>
+              <a:t>0</a:t>
+            </a:r>
+            <a:r>
+              <a:rPr lang="en-US" sz="1800" dirty="0">
+                <a:solidFill>
+                  <a:srgbClr val="FFFFFF"/>
+                </a:solidFill>
+                <a:latin typeface="Calibri" pitchFamily="34" charset="0"/>
+                <a:ea typeface="Calibri" pitchFamily="34" charset="-122"/>
+                <a:cs typeface="Calibri" pitchFamily="34" charset="-120"/>
+              </a:rPr>
+              <a:t>, and both classes look equally impossible. The answer is lost.</a:t>
+            </a:r>
+            <a:endParaRPr lang="en-US" sz="1800" dirty="0"/>
+          </a:p>
+        </p:txBody>
+      </p:sp>
+      <p:sp>
+        <p:nvSpPr>
+          <p:cNvPr id="8" name="Text 6"/>
+          <p:cNvSpPr txBox="1"/>
+          <p:nvPr/>
+        </p:nvSpPr>
+        <p:spPr>
+          <a:xfrm>
+            <a:off x="731520" y="5440680"/>
+            <a:ext cx="10698480" cy="548640"/>
+          </a:xfrm>
+          <a:prstGeom prst="rect">
+            <a:avLst/>
+          </a:prstGeom>
+          <a:noFill/>
+          <a:ln/>
+        </p:spPr>
+        <p:txBody>
+          <a:bodyPr wrap="square" lIns="0" tIns="0" rIns="0" bIns="0" rtlCol="0" anchor="ctr"/>
+          <a:lstStyle/>
+          <a:p>
+            <a:pPr marL="0" indent="0" algn="ctr">
+              <a:buNone/>
+            </a:pPr>
+            <a:r>
+              <a:rPr lang="en-US" sz="1600" i="1" dirty="0">
+                <a:solidFill>
+                  <a:srgbClr val="1B2A4A"/>
+                </a:solidFill>
+                <a:latin typeface="Calibri" pitchFamily="34" charset="0"/>
+                <a:ea typeface="Calibri" pitchFamily="34" charset="-122"/>
+                <a:cs typeface="Calibri" pitchFamily="34" charset="-120"/>
+              </a:rPr>
+              <a:t>This is called numeric underflow. We need a way to keep the numbers manageable — without changing the winner.</a:t>
+            </a:r>
+            <a:endParaRPr lang="en-US" sz="1600" dirty="0"/>
+          </a:p>
+        </p:txBody>
+      </p:sp>
+    </p:spTree>
+  </p:cSld>
+  <p:clrMapOvr>
+    <a:masterClrMapping/>
+  </p:clrMapOvr>
+</p:sld>
+</file>
+
+<file path=ppt/slides/slide13.xml><?xml version="1.0" encoding="utf-8"?>
+<p:sld xmlns:a="http://schemas.openxmlformats.org/drawingml/2006/main" xmlns:r="http://schemas.openxmlformats.org/officeDocument/2006/relationships" xmlns:p="http://schemas.openxmlformats.org/presentationml/2006/main">
+  <p:cSld name="Slide 13">
+    <p:bg>
+      <p:bgPr>
+        <a:solidFill>
           <a:srgbClr val="1B2A4A"/>
         </a:solidFill>
         <a:effectLst/>
@@ -1899,7 +2375,7 @@
               <a:buNone/>
             </a:pPr>
             <a:r>
-              <a:rPr lang="en-US" sz="3400" b="1" dirty="0">
+              <a:rPr lang="en-US" sz="3600" b="1" dirty="0">
                 <a:solidFill>
                   <a:srgbClr val="E8A33D"/>
                 </a:solidFill>
@@ -1907,26 +2383,65 @@
                 <a:ea typeface="Cambria" pitchFamily="34" charset="-122"/>
                 <a:cs typeface="Cambria" pitchFamily="34" charset="-120"/>
               </a:rPr>
-              <a:t>The whole pipeline</a:t>
-            </a:r>
-            <a:endParaRPr lang="en-US" sz="3400" dirty="0"/>
-          </a:p>
-        </p:txBody>
-      </p:sp>
-      <p:sp>
-        <p:nvSpPr>
-          <p:cNvPr id="3" name="Shape 1"/>
+              <a:t>Logs turn × into +</a:t>
+            </a:r>
+            <a:endParaRPr lang="en-US" sz="3600" dirty="0"/>
+          </a:p>
+        </p:txBody>
+      </p:sp>
+      <p:sp>
+        <p:nvSpPr>
+          <p:cNvPr id="3" name="Text 1"/>
+          <p:cNvSpPr txBox="1"/>
+          <p:nvPr/>
+        </p:nvSpPr>
+        <p:spPr>
+          <a:xfrm>
+            <a:off x="822960" y="1417320"/>
+            <a:ext cx="10515600" cy="457200"/>
+          </a:xfrm>
+          <a:prstGeom prst="rect">
+            <a:avLst/>
+          </a:prstGeom>
+          <a:noFill/>
+          <a:ln/>
+        </p:spPr>
+        <p:txBody>
+          <a:bodyPr wrap="square" lIns="0" tIns="0" rIns="0" bIns="0" rtlCol="0" anchor="ctr"/>
+          <a:lstStyle/>
+          <a:p>
+            <a:pPr marL="0" indent="0">
+              <a:buNone/>
+            </a:pPr>
+            <a:r>
+              <a:rPr lang="en-US" sz="1900" dirty="0">
+                <a:solidFill>
+                  <a:srgbClr val="AEB9CC"/>
+                </a:solidFill>
+                <a:latin typeface="Calibri" pitchFamily="34" charset="0"/>
+                <a:ea typeface="Calibri" pitchFamily="34" charset="-122"/>
+                <a:cs typeface="Calibri" pitchFamily="34" charset="-120"/>
+              </a:rPr>
+              <a:t>The one property of logarithms we need:</a:t>
+            </a:r>
+            <a:endParaRPr lang="en-US" sz="1900" dirty="0"/>
+          </a:p>
+        </p:txBody>
+      </p:sp>
+      <p:sp>
+        <p:nvSpPr>
+          <p:cNvPr id="4" name="Shape 2"/>
           <p:cNvSpPr/>
           <p:nvPr/>
         </p:nvSpPr>
         <p:spPr>
           <a:xfrm>
-            <a:off x="822960" y="1600200"/>
-            <a:ext cx="5074920" cy="4206240"/>
+            <a:off x="1463040" y="2057400"/>
+            <a:ext cx="9235440" cy="1280160"/>
           </a:xfrm>
           <a:prstGeom prst="roundRect">
             <a:avLst>
-              <a:gd name="adj" fmla="val 2609"/>
+              <a:gd name="adj" fmla="val 8571"/>
             </a:avLst>
           </a:prstGeom>
           <a:solidFill>
@@ -1944,53 +2459,64 @@
       </p:sp>
       <p:sp>
         <p:nvSpPr>
-          <p:cNvPr id="4" name="Text 2"/>
-          <p:cNvSpPr txBox="1"/>
-          <p:nvPr/>
-        </p:nvSpPr>
-        <p:spPr>
-          <a:xfrm>
-            <a:off x="1143000" y="1828800"/>
-            <a:ext cx="4572000" cy="457200"/>
-          </a:xfrm>
-          <a:prstGeom prst="rect">
-            <a:avLst/>
-          </a:prstGeom>
-          <a:noFill/>
-          <a:ln/>
-        </p:spPr>
-        <p:txBody>
-          <a:bodyPr wrap="square" lIns="0" tIns="0" rIns="0" bIns="0" rtlCol="0" anchor="ctr"/>
-          <a:lstStyle/>
-          <a:p>
-            <a:pPr marL="0" indent="0">
-              <a:buNone/>
-            </a:pPr>
-            <a:r>
-              <a:rPr lang="en-US" sz="2000" b="1" dirty="0">
-                <a:solidFill>
-                  <a:srgbClr val="2B6CB0"/>
-                </a:solidFill>
-                <a:latin typeface="Calibri" pitchFamily="34" charset="0"/>
-                <a:ea typeface="Calibri" pitchFamily="34" charset="-122"/>
-                <a:cs typeface="Calibri" pitchFamily="34" charset="-120"/>
-              </a:rPr>
-              <a:t>TRAINING   (count)</a:t>
-            </a:r>
-            <a:endParaRPr lang="en-US" sz="2000" dirty="0"/>
-          </a:p>
-        </p:txBody>
-      </p:sp>
-      <p:sp>
-        <p:nvSpPr>
           <p:cNvPr id="5" name="Text 3"/>
           <p:cNvSpPr txBox="1"/>
           <p:nvPr/>
         </p:nvSpPr>
         <p:spPr>
           <a:xfrm>
-            <a:off x="1143000" y="2423160"/>
-            <a:ext cx="4572000" cy="3200400"/>
+            <a:off x="1463040" y="2057400"/>
+            <a:ext cx="9235440" cy="1280160"/>
+          </a:xfrm>
+          <a:prstGeom prst="rect">
+            <a:avLst/>
+          </a:prstGeom>
+          <a:noFill/>
+          <a:ln/>
+        </p:spPr>
+        <p:txBody>
+          <a:bodyPr wrap="square" lIns="0" tIns="0" rIns="0" bIns="0" rtlCol="0" anchor="ctr"/>
+          <a:lstStyle/>
+          <a:p>
+            <a:pPr marL="0" indent="0" algn="ctr">
+              <a:buNone/>
+            </a:pPr>
+            <a:r>
+              <a:rPr lang="en-US" sz="3000" b="1" dirty="0">
+                <a:solidFill>
+                  <a:srgbClr val="E8A33D"/>
+                </a:solidFill>
+                <a:latin typeface="Calibri" pitchFamily="34" charset="0"/>
+                <a:ea typeface="Calibri" pitchFamily="34" charset="-122"/>
+                <a:cs typeface="Calibri" pitchFamily="34" charset="-120"/>
+              </a:rPr>
+              <a:t>log(a × b)</a:t>
+            </a:r>
+            <a:r>
+              <a:rPr lang="en-US" sz="3000" dirty="0">
+                <a:solidFill>
+                  <a:srgbClr val="FFFFFF"/>
+                </a:solidFill>
+                <a:latin typeface="Calibri" pitchFamily="34" charset="0"/>
+                <a:ea typeface="Calibri" pitchFamily="34" charset="-122"/>
+                <a:cs typeface="Calibri" pitchFamily="34" charset="-120"/>
+              </a:rPr>
+              <a:t>  =  log(a) + log(b)</a:t>
+            </a:r>
+            <a:endParaRPr lang="en-US" sz="3000" dirty="0"/>
+          </a:p>
+        </p:txBody>
+      </p:sp>
+      <p:sp>
+        <p:nvSpPr>
+          <p:cNvPr id="6" name="Text 4"/>
+          <p:cNvSpPr txBox="1"/>
+          <p:nvPr/>
+        </p:nvSpPr>
+        <p:spPr>
+          <a:xfrm>
+            <a:off x="822960" y="3611880"/>
+            <a:ext cx="10515600" cy="685800"/>
           </a:xfrm>
           <a:prstGeom prst="rect">
             <a:avLst/>
@@ -2004,24 +2530,12 @@
           <a:p>
             <a:pPr marL="0" indent="0">
               <a:lnSpc>
-                <a:spcPct val="125000"/>
+                <a:spcPct val="115000"/>
               </a:lnSpc>
               <a:buNone/>
             </a:pPr>
             <a:r>
-              <a:rPr lang="en-US" sz="1600" b="1" dirty="0">
-                <a:solidFill>
-                  <a:srgbClr val="FFFFFF"/>
-                </a:solidFill>
-                <a:latin typeface="Calibri" pitchFamily="34" charset="0"/>
-                <a:ea typeface="Calibri" pitchFamily="34" charset="-122"/>
-                <a:cs typeface="Calibri" pitchFamily="34" charset="-120"/>
-              </a:rPr>
-              <a:t>Count reviews per label
-</a:t>
-            </a:r>
-            <a:r>
-              <a:rPr lang="en-US" sz="1600" dirty="0">
+              <a:rPr lang="en-US" sz="1700" dirty="0">
                 <a:solidFill>
                   <a:srgbClr val="AEB9CC"/>
                 </a:solidFill>
@@ -2029,99 +2543,30 @@
                 <a:ea typeface="Calibri" pitchFamily="34" charset="-122"/>
                 <a:cs typeface="Calibri" pitchFamily="34" charset="-120"/>
               </a:rPr>
-              <a:t>→  </a:t>
-            </a:r>
-            <a:r>
-              <a:rPr lang="en-US" sz="1600" b="1" dirty="0">
-                <a:solidFill>
-                  <a:srgbClr val="E8A33D"/>
-                </a:solidFill>
-                <a:latin typeface="Calibri" pitchFamily="34" charset="0"/>
-                <a:ea typeface="Calibri" pitchFamily="34" charset="-122"/>
-                <a:cs typeface="Calibri" pitchFamily="34" charset="-120"/>
-              </a:rPr>
-              <a:t>prior</a:t>
-            </a:r>
-            <a:r>
-              <a:rPr lang="en-US" sz="1600" dirty="0">
-                <a:solidFill>
-                  <a:srgbClr val="AEB9CC"/>
-                </a:solidFill>
-                <a:latin typeface="Calibri" pitchFamily="34" charset="0"/>
-                <a:ea typeface="Calibri" pitchFamily="34" charset="-122"/>
-                <a:cs typeface="Calibri" pitchFamily="34" charset="-120"/>
-              </a:rPr>
-              <a:t>  P(class)
-</a:t>
-            </a:r>
-            <a:r>
-              <a:rPr lang="en-US" sz="1600" b="1" dirty="0">
-                <a:solidFill>
-                  <a:srgbClr val="FFFFFF"/>
-                </a:solidFill>
-                <a:latin typeface="Calibri" pitchFamily="34" charset="0"/>
-                <a:ea typeface="Calibri" pitchFamily="34" charset="-122"/>
-                <a:cs typeface="Calibri" pitchFamily="34" charset="-120"/>
-              </a:rPr>
-              <a:t>Count words per label,
-add-1 smooth
-</a:t>
-            </a:r>
-            <a:r>
-              <a:rPr lang="en-US" sz="1600" dirty="0">
-                <a:solidFill>
-                  <a:srgbClr val="AEB9CC"/>
-                </a:solidFill>
-                <a:latin typeface="Calibri" pitchFamily="34" charset="0"/>
-                <a:ea typeface="Calibri" pitchFamily="34" charset="-122"/>
-                <a:cs typeface="Calibri" pitchFamily="34" charset="-120"/>
-              </a:rPr>
-              <a:t>→  </a:t>
-            </a:r>
-            <a:r>
-              <a:rPr lang="en-US" sz="1600" b="1" dirty="0">
-                <a:solidFill>
-                  <a:srgbClr val="E8A33D"/>
-                </a:solidFill>
-                <a:latin typeface="Calibri" pitchFamily="34" charset="0"/>
-                <a:ea typeface="Calibri" pitchFamily="34" charset="-122"/>
-                <a:cs typeface="Calibri" pitchFamily="34" charset="-120"/>
-              </a:rPr>
-              <a:t>likelihood</a:t>
-            </a:r>
-            <a:r>
-              <a:rPr lang="en-US" sz="1600" dirty="0">
-                <a:solidFill>
-                  <a:srgbClr val="AEB9CC"/>
-                </a:solidFill>
-                <a:latin typeface="Calibri" pitchFamily="34" charset="0"/>
-                <a:ea typeface="Calibri" pitchFamily="34" charset="-122"/>
-                <a:cs typeface="Calibri" pitchFamily="34" charset="-120"/>
-              </a:rPr>
-              <a:t>  P(word|class)</a:t>
-            </a:r>
-            <a:endParaRPr lang="en-US" sz="1600" dirty="0"/>
-          </a:p>
-        </p:txBody>
-      </p:sp>
-      <p:sp>
-        <p:nvSpPr>
-          <p:cNvPr id="6" name="Shape 4"/>
+              <a:t>A shrinking product of many tiny numbers becomes a sum of moderate ones. So instead of multiplying probabilities, we add their logs:</a:t>
+            </a:r>
+            <a:endParaRPr lang="en-US" sz="1700" dirty="0"/>
+          </a:p>
+        </p:txBody>
+      </p:sp>
+      <p:sp>
+        <p:nvSpPr>
+          <p:cNvPr id="7" name="Shape 5"/>
           <p:cNvSpPr/>
           <p:nvPr/>
         </p:nvSpPr>
         <p:spPr>
           <a:xfrm>
-            <a:off x="6263640" y="1600200"/>
-            <a:ext cx="5074920" cy="4206240"/>
+            <a:off x="1463040" y="4434840"/>
+            <a:ext cx="9235440" cy="1234440"/>
           </a:xfrm>
           <a:prstGeom prst="roundRect">
             <a:avLst>
-              <a:gd name="adj" fmla="val 2609"/>
+              <a:gd name="adj" fmla="val 8889"/>
             </a:avLst>
           </a:prstGeom>
           <a:solidFill>
-            <a:srgbClr val="24365C"/>
+            <a:srgbClr val="E8A33D"/>
           </a:solidFill>
           <a:ln/>
         </p:spPr>
@@ -2135,84 +2580,80 @@
       </p:sp>
       <p:sp>
         <p:nvSpPr>
-          <p:cNvPr id="7" name="Text 5"/>
-          <p:cNvSpPr txBox="1"/>
-          <p:nvPr/>
-        </p:nvSpPr>
-        <p:spPr>
-          <a:xfrm>
-            <a:off x="6583680" y="1828800"/>
-            <a:ext cx="4572000" cy="457200"/>
-          </a:xfrm>
-          <a:prstGeom prst="rect">
-            <a:avLst/>
-          </a:prstGeom>
-          <a:noFill/>
-          <a:ln/>
-        </p:spPr>
-        <p:txBody>
-          <a:bodyPr wrap="square" lIns="0" tIns="0" rIns="0" bIns="0" rtlCol="0" anchor="ctr"/>
-          <a:lstStyle/>
-          <a:p>
-            <a:pPr marL="0" indent="0">
-              <a:buNone/>
-            </a:pPr>
-            <a:r>
-              <a:rPr lang="en-US" sz="2000" b="1" dirty="0">
-                <a:solidFill>
-                  <a:srgbClr val="E8A33D"/>
-                </a:solidFill>
-                <a:latin typeface="Calibri" pitchFamily="34" charset="0"/>
-                <a:ea typeface="Calibri" pitchFamily="34" charset="-122"/>
-                <a:cs typeface="Calibri" pitchFamily="34" charset="-120"/>
-              </a:rPr>
-              <a:t>PREDICTING   (Bayes)</a:t>
-            </a:r>
-            <a:endParaRPr lang="en-US" sz="2000" dirty="0"/>
-          </a:p>
-        </p:txBody>
-      </p:sp>
-      <p:sp>
-        <p:nvSpPr>
           <p:cNvPr id="8" name="Text 6"/>
           <p:cNvSpPr txBox="1"/>
           <p:nvPr/>
         </p:nvSpPr>
         <p:spPr>
           <a:xfrm>
-            <a:off x="6583680" y="2423160"/>
-            <a:ext cx="4572000" cy="3291840"/>
-          </a:xfrm>
-          <a:prstGeom prst="rect">
-            <a:avLst/>
-          </a:prstGeom>
-          <a:noFill/>
-          <a:ln/>
-        </p:spPr>
-        <p:txBody>
-          <a:bodyPr wrap="square" lIns="0" tIns="0" rIns="0" bIns="0" rtlCol="0" anchor="ctr"/>
-          <a:lstStyle/>
-          <a:p>
-            <a:pPr marL="0" indent="0">
-              <a:lnSpc>
-                <a:spcPct val="120000"/>
-              </a:lnSpc>
-              <a:buNone/>
-            </a:pPr>
-            <a:r>
-              <a:rPr lang="en-US" sz="1600" b="1" dirty="0">
-                <a:solidFill>
-                  <a:srgbClr val="FFFFFF"/>
-                </a:solidFill>
-                <a:latin typeface="Calibri" pitchFamily="34" charset="0"/>
-                <a:ea typeface="Calibri" pitchFamily="34" charset="-122"/>
-                <a:cs typeface="Calibri" pitchFamily="34" charset="-120"/>
-              </a:rPr>
-              <a:t>For each class:  prior × ∏ likelihoods
-</a:t>
-            </a:r>
-            <a:r>
-              <a:rPr lang="en-US" sz="1600" dirty="0">
+            <a:off x="1463040" y="4434840"/>
+            <a:ext cx="9235440" cy="1234440"/>
+          </a:xfrm>
+          <a:prstGeom prst="rect">
+            <a:avLst/>
+          </a:prstGeom>
+          <a:noFill/>
+          <a:ln/>
+        </p:spPr>
+        <p:txBody>
+          <a:bodyPr wrap="square" lIns="0" tIns="0" rIns="0" bIns="0" rtlCol="0" anchor="ctr"/>
+          <a:lstStyle/>
+          <a:p>
+            <a:pPr marL="0" indent="0" algn="ctr">
+              <a:buNone/>
+            </a:pPr>
+            <a:r>
+              <a:rPr lang="en-US" sz="2200" b="1" dirty="0">
+                <a:solidFill>
+                  <a:srgbClr val="1B2A4A"/>
+                </a:solidFill>
+                <a:latin typeface="Calibri" pitchFamily="34" charset="0"/>
+                <a:ea typeface="Calibri" pitchFamily="34" charset="-122"/>
+                <a:cs typeface="Calibri" pitchFamily="34" charset="-120"/>
+              </a:rPr>
+              <a:t>log-score</a:t>
+            </a:r>
+            <a:r>
+              <a:rPr lang="en-US" sz="2200" dirty="0">
+                <a:solidFill>
+                  <a:srgbClr val="1B2A4A"/>
+                </a:solidFill>
+                <a:latin typeface="Calibri" pitchFamily="34" charset="0"/>
+                <a:ea typeface="Calibri" pitchFamily="34" charset="-122"/>
+                <a:cs typeface="Calibri" pitchFamily="34" charset="-120"/>
+              </a:rPr>
+              <a:t>  =  log P(class)  +  Σ log P(word | class)</a:t>
+            </a:r>
+            <a:endParaRPr lang="en-US" sz="2200" dirty="0"/>
+          </a:p>
+        </p:txBody>
+      </p:sp>
+      <p:sp>
+        <p:nvSpPr>
+          <p:cNvPr id="9" name="Text 7"/>
+          <p:cNvSpPr txBox="1"/>
+          <p:nvPr/>
+        </p:nvSpPr>
+        <p:spPr>
+          <a:xfrm>
+            <a:off x="822960" y="5852160"/>
+            <a:ext cx="10515600" cy="457200"/>
+          </a:xfrm>
+          <a:prstGeom prst="rect">
+            <a:avLst/>
+          </a:prstGeom>
+          <a:noFill/>
+          <a:ln/>
+        </p:spPr>
+        <p:txBody>
+          <a:bodyPr wrap="square" lIns="0" tIns="0" rIns="0" bIns="0" rtlCol="0" anchor="ctr"/>
+          <a:lstStyle/>
+          <a:p>
+            <a:pPr marL="0" indent="0" algn="ctr">
+              <a:buNone/>
+            </a:pPr>
+            <a:r>
+              <a:rPr lang="en-US" sz="1500" i="1" dirty="0">
                 <a:solidFill>
                   <a:srgbClr val="AEB9CC"/>
                 </a:solidFill>
@@ -2220,138 +2661,7 @@
                 <a:ea typeface="Calibri" pitchFamily="34" charset="-122"/>
                 <a:cs typeface="Calibri" pitchFamily="34" charset="-120"/>
               </a:rPr>
-              <a:t>→  a score per class
-</a:t>
-            </a:r>
-            <a:r>
-              <a:rPr lang="en-US" sz="1600" b="1" dirty="0">
-                <a:solidFill>
-                  <a:srgbClr val="FFFFFF"/>
-                </a:solidFill>
-                <a:latin typeface="Calibri" pitchFamily="34" charset="0"/>
-                <a:ea typeface="Calibri" pitchFamily="34" charset="-122"/>
-                <a:cs typeface="Calibri" pitchFamily="34" charset="-120"/>
-              </a:rPr>
-              <a:t>Add the scores
-</a:t>
-            </a:r>
-            <a:r>
-              <a:rPr lang="en-US" sz="1600" dirty="0">
-                <a:solidFill>
-                  <a:srgbClr val="AEB9CC"/>
-                </a:solidFill>
-                <a:latin typeface="Calibri" pitchFamily="34" charset="0"/>
-                <a:ea typeface="Calibri" pitchFamily="34" charset="-122"/>
-                <a:cs typeface="Calibri" pitchFamily="34" charset="-120"/>
-              </a:rPr>
-              <a:t>→  </a:t>
-            </a:r>
-            <a:r>
-              <a:rPr lang="en-US" sz="1600" b="1" dirty="0">
-                <a:solidFill>
-                  <a:srgbClr val="E8A33D"/>
-                </a:solidFill>
-                <a:latin typeface="Calibri" pitchFamily="34" charset="0"/>
-                <a:ea typeface="Calibri" pitchFamily="34" charset="-122"/>
-                <a:cs typeface="Calibri" pitchFamily="34" charset="-120"/>
-              </a:rPr>
-              <a:t>evidence</a:t>
-            </a:r>
-            <a:r>
-              <a:rPr lang="en-US" sz="1600" dirty="0">
-                <a:solidFill>
-                  <a:srgbClr val="AEB9CC"/>
-                </a:solidFill>
-                <a:latin typeface="Calibri" pitchFamily="34" charset="0"/>
-                <a:ea typeface="Calibri" pitchFamily="34" charset="-122"/>
-                <a:cs typeface="Calibri" pitchFamily="34" charset="-120"/>
-              </a:rPr>
-              <a:t>  P(review)
-</a:t>
-            </a:r>
-            <a:r>
-              <a:rPr lang="en-US" sz="1600" b="1" dirty="0">
-                <a:solidFill>
-                  <a:srgbClr val="FFFFFF"/>
-                </a:solidFill>
-                <a:latin typeface="Calibri" pitchFamily="34" charset="0"/>
-                <a:ea typeface="Calibri" pitchFamily="34" charset="-122"/>
-                <a:cs typeface="Calibri" pitchFamily="34" charset="-120"/>
-              </a:rPr>
-              <a:t>Divide score by evidence
-</a:t>
-            </a:r>
-            <a:r>
-              <a:rPr lang="en-US" sz="1600" dirty="0">
-                <a:solidFill>
-                  <a:srgbClr val="AEB9CC"/>
-                </a:solidFill>
-                <a:latin typeface="Calibri" pitchFamily="34" charset="0"/>
-                <a:ea typeface="Calibri" pitchFamily="34" charset="-122"/>
-                <a:cs typeface="Calibri" pitchFamily="34" charset="-120"/>
-              </a:rPr>
-              <a:t>→  </a:t>
-            </a:r>
-            <a:r>
-              <a:rPr lang="en-US" sz="1600" b="1" dirty="0">
-                <a:solidFill>
-                  <a:srgbClr val="E8A33D"/>
-                </a:solidFill>
-                <a:latin typeface="Calibri" pitchFamily="34" charset="0"/>
-                <a:ea typeface="Calibri" pitchFamily="34" charset="-122"/>
-                <a:cs typeface="Calibri" pitchFamily="34" charset="-120"/>
-              </a:rPr>
-              <a:t>posterior</a:t>
-            </a:r>
-            <a:r>
-              <a:rPr lang="en-US" sz="1600" dirty="0">
-                <a:solidFill>
-                  <a:srgbClr val="AEB9CC"/>
-                </a:solidFill>
-                <a:latin typeface="Calibri" pitchFamily="34" charset="0"/>
-                <a:ea typeface="Calibri" pitchFamily="34" charset="-122"/>
-                <a:cs typeface="Calibri" pitchFamily="34" charset="-120"/>
-              </a:rPr>
-              <a:t>  → pick the bigger</a:t>
-            </a:r>
-            <a:endParaRPr lang="en-US" sz="1600" dirty="0"/>
-          </a:p>
-        </p:txBody>
-      </p:sp>
-      <p:sp>
-        <p:nvSpPr>
-          <p:cNvPr id="9" name="Text 7"/>
-          <p:cNvSpPr txBox="1"/>
-          <p:nvPr/>
-        </p:nvSpPr>
-        <p:spPr>
-          <a:xfrm>
-            <a:off x="822960" y="5989320"/>
-            <a:ext cx="10515600" cy="457200"/>
-          </a:xfrm>
-          <a:prstGeom prst="rect">
-            <a:avLst/>
-          </a:prstGeom>
-          <a:noFill/>
-          <a:ln/>
-        </p:spPr>
-        <p:txBody>
-          <a:bodyPr wrap="square" lIns="0" tIns="0" rIns="0" bIns="0" rtlCol="0" anchor="ctr"/>
-          <a:lstStyle/>
-          <a:p>
-            <a:pPr marL="0" indent="0" algn="ctr">
-              <a:buNone/>
-            </a:pPr>
-            <a:r>
-              <a:rPr lang="en-US" sz="1500" i="1" dirty="0">
-                <a:solidFill>
-                  <a:srgbClr val="AEB9CC"/>
-                </a:solidFill>
-                <a:latin typeface="Calibri" pitchFamily="34" charset="0"/>
-                <a:ea typeface="Calibri" pitchFamily="34" charset="-122"/>
-                <a:cs typeface="Calibri" pitchFamily="34" charset="-120"/>
-              </a:rPr>
-              <a:t>Every Bayes word — prior, likelihood, evidence, posterior — shows up exactly once. That's the entire method.</a:t>
+              <a:t>Same Bayes numerator — just measured on a log scale, where multiply becomes add.</a:t>
             </a:r>
             <a:endParaRPr lang="en-US" sz="1500" dirty="0"/>
           </a:p>
@@ -2365,9 +2675,9 @@
 </p:sld>
 </file>
 
-<file path=ppt/slides/slide13.xml><?xml version="1.0" encoding="utf-8"?>
+<file path=ppt/slides/slide14.xml><?xml version="1.0" encoding="utf-8"?>
 <p:sld xmlns:a="http://schemas.openxmlformats.org/drawingml/2006/main" xmlns:r="http://schemas.openxmlformats.org/officeDocument/2006/relationships" xmlns:p="http://schemas.openxmlformats.org/presentationml/2006/main">
-  <p:cSld name="Slide 13">
+  <p:cSld name="Slide 14">
     <p:bg>
       <p:bgPr>
         <a:solidFill>
@@ -2415,7 +2725,7 @@
               <a:buNone/>
             </a:pPr>
             <a:r>
-              <a:rPr lang="en-US" sz="3200" b="1" dirty="0">
+              <a:rPr lang="en-US" sz="3400" b="1" dirty="0">
                 <a:solidFill>
                   <a:srgbClr val="1B2A4A"/>
                 </a:solidFill>
@@ -2423,9 +2733,9 @@
                 <a:ea typeface="Cambria" pitchFamily="34" charset="-122"/>
                 <a:cs typeface="Cambria" pitchFamily="34" charset="-120"/>
               </a:rPr>
-              <a:t>What you just built — and its limits</a:t>
-            </a:r>
-            <a:endParaRPr lang="en-US" sz="3200" dirty="0"/>
+              <a:t>Our review, scored with logs</a:t>
+            </a:r>
+            <a:endParaRPr lang="en-US" sz="3400" dirty="0"/>
           </a:p>
         </p:txBody>
       </p:sp>
@@ -2437,8 +2747,8 @@
         </p:nvSpPr>
         <p:spPr>
           <a:xfrm>
-            <a:off x="731520" y="1280160"/>
-            <a:ext cx="10698480" cy="640080"/>
+            <a:off x="731520" y="1234440"/>
+            <a:ext cx="10698480" cy="457200"/>
           </a:xfrm>
           <a:prstGeom prst="rect">
             <a:avLst/>
@@ -2451,9 +2761,6 @@
           <a:lstStyle/>
           <a:p>
             <a:pPr marL="0" indent="0">
-              <a:lnSpc>
-                <a:spcPct val="110000"/>
-              </a:lnSpc>
               <a:buNone/>
             </a:pPr>
             <a:r>
@@ -2465,7 +2772,7 @@
                 <a:ea typeface="Calibri" pitchFamily="34" charset="-122"/>
                 <a:cs typeface="Calibri" pitchFamily="34" charset="-120"/>
               </a:rPr>
-              <a:t>A real, working classifier from nothing but counts. The same recipe scales to thousands of reviews. But know its blind spots:</a:t>
+              <a:t>Take the log of each number from slide “Score it for each class”, then just add them up.  (log = natural log, ln)</a:t>
             </a:r>
             <a:endParaRPr lang="en-US" sz="1600" dirty="0"/>
           </a:p>
@@ -2479,12 +2786,12 @@
         </p:nvSpPr>
         <p:spPr>
           <a:xfrm>
-            <a:off x="731520" y="2148840"/>
-            <a:ext cx="3291840" cy="2880360"/>
+            <a:off x="731520" y="1965960"/>
+            <a:ext cx="5257800" cy="3291840"/>
           </a:xfrm>
           <a:prstGeom prst="roundRect">
             <a:avLst>
-              <a:gd name="adj" fmla="val 3810"/>
+              <a:gd name="adj" fmla="val 3333"/>
             </a:avLst>
           </a:prstGeom>
           <a:solidFill>
@@ -2509,28 +2816,40 @@
       </p:sp>
       <p:sp>
         <p:nvSpPr>
-          <p:cNvPr id="5" name="Shape 3"/>
-          <p:cNvSpPr/>
-          <p:nvPr/>
-        </p:nvSpPr>
-        <p:spPr>
-          <a:xfrm>
-            <a:off x="1051560" y="2514600"/>
-            <a:ext cx="640080" cy="640080"/>
-          </a:xfrm>
-          <a:prstGeom prst="ellipse">
-            <a:avLst/>
-          </a:prstGeom>
-          <a:solidFill>
-            <a:srgbClr val="E8A33D"/>
-          </a:solidFill>
-          <a:ln/>
-        </p:spPr>
-        <p:txBody>
-          <a:bodyPr/>
-          <a:lstStyle/>
-          <a:p>
-            <a:endParaRPr lang="en-US"/>
+          <p:cNvPr id="5" name="Text 3"/>
+          <p:cNvSpPr txBox="1"/>
+          <p:nvPr/>
+        </p:nvSpPr>
+        <p:spPr>
+          <a:xfrm>
+            <a:off x="1051560" y="2194560"/>
+            <a:ext cx="4617720" cy="457200"/>
+          </a:xfrm>
+          <a:prstGeom prst="rect">
+            <a:avLst/>
+          </a:prstGeom>
+          <a:noFill/>
+          <a:ln/>
+        </p:spPr>
+        <p:txBody>
+          <a:bodyPr wrap="square" lIns="0" tIns="0" rIns="0" bIns="0" rtlCol="0" anchor="ctr"/>
+          <a:lstStyle/>
+          <a:p>
+            <a:pPr marL="0" indent="0">
+              <a:buNone/>
+            </a:pPr>
+            <a:r>
+              <a:rPr lang="en-US" sz="2000" b="1" dirty="0">
+                <a:solidFill>
+                  <a:srgbClr val="2F855A"/>
+                </a:solidFill>
+                <a:latin typeface="Calibri" pitchFamily="34" charset="0"/>
+                <a:ea typeface="Calibri" pitchFamily="34" charset="-122"/>
+                <a:cs typeface="Calibri" pitchFamily="34" charset="-120"/>
+              </a:rPr>
+              <a:t>POSITIVE</a:t>
+            </a:r>
+            <a:endParaRPr lang="en-US" sz="2000" dirty="0"/>
           </a:p>
         </p:txBody>
       </p:sp>
@@ -2542,89 +2861,8 @@
         </p:nvSpPr>
         <p:spPr>
           <a:xfrm>
-            <a:off x="1051560" y="2514600"/>
-            <a:ext cx="640080" cy="640080"/>
-          </a:xfrm>
-          <a:prstGeom prst="rect">
-            <a:avLst/>
-          </a:prstGeom>
-          <a:noFill/>
-          <a:ln/>
-        </p:spPr>
-        <p:txBody>
-          <a:bodyPr wrap="square" lIns="0" tIns="0" rIns="0" bIns="0" rtlCol="0" anchor="ctr"/>
-          <a:lstStyle/>
-          <a:p>
-            <a:pPr marL="0" indent="0" algn="ctr">
-              <a:buNone/>
-            </a:pPr>
-            <a:r>
-              <a:rPr lang="en-US" sz="2000" b="1" dirty="0">
-                <a:solidFill>
-                  <a:srgbClr val="1B2A4A"/>
-                </a:solidFill>
-                <a:latin typeface="Calibri" pitchFamily="34" charset="0"/>
-                <a:ea typeface="Calibri" pitchFamily="34" charset="-122"/>
-                <a:cs typeface="Calibri" pitchFamily="34" charset="-120"/>
-              </a:rPr>
-              <a:t>1</a:t>
-            </a:r>
-            <a:endParaRPr lang="en-US" sz="2000" dirty="0"/>
-          </a:p>
-        </p:txBody>
-      </p:sp>
-      <p:sp>
-        <p:nvSpPr>
-          <p:cNvPr id="7" name="Text 5"/>
-          <p:cNvSpPr txBox="1"/>
-          <p:nvPr/>
-        </p:nvSpPr>
-        <p:spPr>
-          <a:xfrm>
-            <a:off x="1051560" y="3337560"/>
-            <a:ext cx="2651760" cy="822960"/>
-          </a:xfrm>
-          <a:prstGeom prst="rect">
-            <a:avLst/>
-          </a:prstGeom>
-          <a:noFill/>
-          <a:ln/>
-        </p:spPr>
-        <p:txBody>
-          <a:bodyPr wrap="square" lIns="0" tIns="0" rIns="0" bIns="0" rtlCol="0" anchor="ctr"/>
-          <a:lstStyle/>
-          <a:p>
-            <a:pPr marL="0" indent="0">
-              <a:lnSpc>
-                <a:spcPct val="100000"/>
-              </a:lnSpc>
-              <a:buNone/>
-            </a:pPr>
-            <a:r>
-              <a:rPr lang="en-US" sz="1700" b="1" dirty="0">
-                <a:solidFill>
-                  <a:srgbClr val="1B2A4A"/>
-                </a:solidFill>
-                <a:latin typeface="Calibri" pitchFamily="34" charset="0"/>
-                <a:ea typeface="Calibri" pitchFamily="34" charset="-122"/>
-                <a:cs typeface="Calibri" pitchFamily="34" charset="-120"/>
-              </a:rPr>
-              <a:t>Ignores word order</a:t>
-            </a:r>
-            <a:endParaRPr lang="en-US" sz="1700" dirty="0"/>
-          </a:p>
-        </p:txBody>
-      </p:sp>
-      <p:sp>
-        <p:nvSpPr>
-          <p:cNvPr id="8" name="Text 6"/>
-          <p:cNvSpPr txBox="1"/>
-          <p:nvPr/>
-        </p:nvSpPr>
-        <p:spPr>
-          <a:xfrm>
-            <a:off x="1051560" y="4069080"/>
-            <a:ext cx="2651760" cy="868680"/>
+            <a:off x="1051560" y="2743200"/>
+            <a:ext cx="4617720" cy="2377440"/>
           </a:xfrm>
           <a:prstGeom prst="rect">
             <a:avLst/>
@@ -2643,34 +2881,61 @@
               <a:buNone/>
             </a:pPr>
             <a:r>
-              <a:rPr lang="en-US" sz="1400" dirty="0">
-                <a:solidFill>
-                  <a:srgbClr val="5B667A"/>
-                </a:solidFill>
-                <a:latin typeface="Calibri" pitchFamily="34" charset="0"/>
-                <a:ea typeface="Calibri" pitchFamily="34" charset="-122"/>
-                <a:cs typeface="Calibri" pitchFamily="34" charset="-120"/>
-              </a:rPr>
-              <a:t>“not good” and “good” look the same in a bag of words. Negation is invisible.</a:t>
-            </a:r>
-            <a:endParaRPr lang="en-US" sz="1400" dirty="0"/>
-          </a:p>
-        </p:txBody>
-      </p:sp>
-      <p:sp>
-        <p:nvSpPr>
-          <p:cNvPr id="9" name="Shape 7"/>
+              <a:rPr lang="en-US" sz="1600" dirty="0">
+                <a:solidFill>
+                  <a:srgbClr val="1B2A4A"/>
+                </a:solidFill>
+                <a:latin typeface="Calibri" pitchFamily="34" charset="0"/>
+                <a:ea typeface="Calibri" pitchFamily="34" charset="-122"/>
+                <a:cs typeface="Calibri" pitchFamily="34" charset="-120"/>
+              </a:rPr>
+              <a:t>log 0.57            = −0.56
+log 0.20 (loved)  = −1.61
+log 0.20 (great)  = −1.61
+log 0.15 (movie) = −1.90
+</a:t>
+            </a:r>
+            <a:r>
+              <a:rPr lang="en-US" sz="1300" dirty="0">
+                <a:solidFill>
+                  <a:srgbClr val="AEB9CC"/>
+                </a:solidFill>
+                <a:latin typeface="Calibri" pitchFamily="34" charset="0"/>
+                <a:ea typeface="Calibri" pitchFamily="34" charset="-122"/>
+                <a:cs typeface="Calibri" pitchFamily="34" charset="-120"/>
+              </a:rPr>
+              <a:t>—————————————————
+</a:t>
+            </a:r>
+            <a:r>
+              <a:rPr lang="en-US" sz="2200" b="1" dirty="0">
+                <a:solidFill>
+                  <a:srgbClr val="2F855A"/>
+                </a:solidFill>
+                <a:latin typeface="Calibri" pitchFamily="34" charset="0"/>
+                <a:ea typeface="Calibri" pitchFamily="34" charset="-122"/>
+                <a:cs typeface="Calibri" pitchFamily="34" charset="-120"/>
+              </a:rPr>
+              <a:t>log-score = −5.68</a:t>
+            </a:r>
+            <a:endParaRPr lang="en-US" sz="1600" dirty="0"/>
+          </a:p>
+        </p:txBody>
+      </p:sp>
+      <p:sp>
+        <p:nvSpPr>
+          <p:cNvPr id="7" name="Shape 5"/>
           <p:cNvSpPr/>
           <p:nvPr/>
         </p:nvSpPr>
         <p:spPr>
           <a:xfrm>
-            <a:off x="4526280" y="2148840"/>
-            <a:ext cx="3291840" cy="2880360"/>
+            <a:off x="6172200" y="1965960"/>
+            <a:ext cx="5257800" cy="3291840"/>
           </a:xfrm>
           <a:prstGeom prst="roundRect">
             <a:avLst>
-              <a:gd name="adj" fmla="val 3810"/>
+              <a:gd name="adj" fmla="val 3333"/>
             </a:avLst>
           </a:prstGeom>
           <a:solidFill>
@@ -2695,65 +2960,38 @@
       </p:sp>
       <p:sp>
         <p:nvSpPr>
-          <p:cNvPr id="10" name="Shape 8"/>
-          <p:cNvSpPr/>
-          <p:nvPr/>
-        </p:nvSpPr>
-        <p:spPr>
-          <a:xfrm>
-            <a:off x="4846320" y="2514600"/>
-            <a:ext cx="640080" cy="640080"/>
-          </a:xfrm>
-          <a:prstGeom prst="ellipse">
-            <a:avLst/>
-          </a:prstGeom>
-          <a:solidFill>
-            <a:srgbClr val="E8A33D"/>
-          </a:solidFill>
-          <a:ln/>
-        </p:spPr>
-        <p:txBody>
-          <a:bodyPr/>
-          <a:lstStyle/>
-          <a:p>
-            <a:endParaRPr lang="en-US"/>
-          </a:p>
-        </p:txBody>
-      </p:sp>
-      <p:sp>
-        <p:nvSpPr>
-          <p:cNvPr id="11" name="Text 9"/>
-          <p:cNvSpPr txBox="1"/>
-          <p:nvPr/>
-        </p:nvSpPr>
-        <p:spPr>
-          <a:xfrm>
-            <a:off x="4846320" y="2514600"/>
-            <a:ext cx="640080" cy="640080"/>
-          </a:xfrm>
-          <a:prstGeom prst="rect">
-            <a:avLst/>
-          </a:prstGeom>
-          <a:noFill/>
-          <a:ln/>
-        </p:spPr>
-        <p:txBody>
-          <a:bodyPr wrap="square" lIns="0" tIns="0" rIns="0" bIns="0" rtlCol="0" anchor="ctr"/>
-          <a:lstStyle/>
-          <a:p>
-            <a:pPr marL="0" indent="0" algn="ctr">
+          <p:cNvPr id="8" name="Text 6"/>
+          <p:cNvSpPr txBox="1"/>
+          <p:nvPr/>
+        </p:nvSpPr>
+        <p:spPr>
+          <a:xfrm>
+            <a:off x="6492240" y="2194560"/>
+            <a:ext cx="4617720" cy="457200"/>
+          </a:xfrm>
+          <a:prstGeom prst="rect">
+            <a:avLst/>
+          </a:prstGeom>
+          <a:noFill/>
+          <a:ln/>
+        </p:spPr>
+        <p:txBody>
+          <a:bodyPr wrap="square" lIns="0" tIns="0" rIns="0" bIns="0" rtlCol="0" anchor="ctr"/>
+          <a:lstStyle/>
+          <a:p>
+            <a:pPr marL="0" indent="0">
               <a:buNone/>
             </a:pPr>
             <a:r>
               <a:rPr lang="en-US" sz="2000" b="1" dirty="0">
                 <a:solidFill>
-                  <a:srgbClr val="1B2A4A"/>
-                </a:solidFill>
-                <a:latin typeface="Calibri" pitchFamily="34" charset="0"/>
-                <a:ea typeface="Calibri" pitchFamily="34" charset="-122"/>
-                <a:cs typeface="Calibri" pitchFamily="34" charset="-120"/>
-              </a:rPr>
-              <a:t>2</a:t>
+                  <a:srgbClr val="C0453B"/>
+                </a:solidFill>
+                <a:latin typeface="Calibri" pitchFamily="34" charset="0"/>
+                <a:ea typeface="Calibri" pitchFamily="34" charset="-122"/>
+                <a:cs typeface="Calibri" pitchFamily="34" charset="-120"/>
+              </a:rPr>
+              <a:t>NEGATIVE</a:t>
             </a:r>
             <a:endParaRPr lang="en-US" sz="2000" dirty="0"/>
           </a:p>
@@ -2761,56 +2999,14 @@
       </p:sp>
       <p:sp>
         <p:nvSpPr>
-          <p:cNvPr id="12" name="Text 10"/>
-          <p:cNvSpPr txBox="1"/>
-          <p:nvPr/>
-        </p:nvSpPr>
-        <p:spPr>
-          <a:xfrm>
-            <a:off x="4846320" y="3337560"/>
-            <a:ext cx="2651760" cy="822960"/>
-          </a:xfrm>
-          <a:prstGeom prst="rect">
-            <a:avLst/>
-          </a:prstGeom>
-          <a:noFill/>
-          <a:ln/>
-        </p:spPr>
-        <p:txBody>
-          <a:bodyPr wrap="square" lIns="0" tIns="0" rIns="0" bIns="0" rtlCol="0" anchor="ctr"/>
-          <a:lstStyle/>
-          <a:p>
-            <a:pPr marL="0" indent="0">
-              <a:lnSpc>
-                <a:spcPct val="100000"/>
-              </a:lnSpc>
-              <a:buNone/>
-            </a:pPr>
-            <a:r>
-              <a:rPr lang="en-US" sz="1700" b="1" dirty="0">
-                <a:solidFill>
-                  <a:srgbClr val="1B2A4A"/>
-                </a:solidFill>
-                <a:latin typeface="Calibri" pitchFamily="34" charset="0"/>
-                <a:ea typeface="Calibri" pitchFamily="34" charset="-122"/>
-                <a:cs typeface="Calibri" pitchFamily="34" charset="-120"/>
-              </a:rPr>
-              <a:t>Assumes words are independent</a:t>
-            </a:r>
-            <a:endParaRPr lang="en-US" sz="1700" dirty="0"/>
-          </a:p>
-        </p:txBody>
-      </p:sp>
-      <p:sp>
-        <p:nvSpPr>
-          <p:cNvPr id="13" name="Text 11"/>
-          <p:cNvSpPr txBox="1"/>
-          <p:nvPr/>
-        </p:nvSpPr>
-        <p:spPr>
-          <a:xfrm>
-            <a:off x="4846320" y="4069080"/>
-            <a:ext cx="2651760" cy="868680"/>
+          <p:cNvPr id="9" name="Text 7"/>
+          <p:cNvSpPr txBox="1"/>
+          <p:nvPr/>
+        </p:nvSpPr>
+        <p:spPr>
+          <a:xfrm>
+            <a:off x="6492240" y="2743200"/>
+            <a:ext cx="4617720" cy="2377440"/>
           </a:xfrm>
           <a:prstGeom prst="rect">
             <a:avLst/>
@@ -2829,93 +3025,57 @@
               <a:buNone/>
             </a:pPr>
             <a:r>
-              <a:rPr lang="en-US" sz="1400" dirty="0">
-                <a:solidFill>
-                  <a:srgbClr val="5B667A"/>
-                </a:solidFill>
-                <a:latin typeface="Calibri" pitchFamily="34" charset="0"/>
-                <a:ea typeface="Calibri" pitchFamily="34" charset="-122"/>
-                <a:cs typeface="Calibri" pitchFamily="34" charset="-120"/>
-              </a:rPr>
-              <a:t>the “naive” bet — wrong, but good enough to rank classes correctly.</a:t>
-            </a:r>
-            <a:endParaRPr lang="en-US" sz="1400" dirty="0"/>
-          </a:p>
-        </p:txBody>
-      </p:sp>
-      <p:sp>
-        <p:nvSpPr>
-          <p:cNvPr id="14" name="Shape 12"/>
-          <p:cNvSpPr/>
-          <p:nvPr/>
-        </p:nvSpPr>
-        <p:spPr>
-          <a:xfrm>
-            <a:off x="8321040" y="2148840"/>
-            <a:ext cx="3291840" cy="2880360"/>
-          </a:xfrm>
-          <a:prstGeom prst="roundRect">
-            <a:avLst>
-              <a:gd name="adj" fmla="val 3810"/>
-            </a:avLst>
-          </a:prstGeom>
-          <a:solidFill>
-            <a:srgbClr val="FFFFFF"/>
-          </a:solidFill>
-          <a:ln/>
-          <a:effectLst>
-            <a:outerShdw blurRad="76200" dist="25400" dir="5400000" algn="bl" rotWithShape="0">
-              <a:srgbClr val="9AA6BC">
-                <a:alpha val="50000"/>
-              </a:srgbClr>
-            </a:outerShdw>
-          </a:effectLst>
-        </p:spPr>
-        <p:txBody>
-          <a:bodyPr/>
-          <a:lstStyle/>
-          <a:p>
-            <a:endParaRPr lang="en-US"/>
-          </a:p>
-        </p:txBody>
-      </p:sp>
-      <p:sp>
-        <p:nvSpPr>
-          <p:cNvPr id="15" name="Shape 13"/>
-          <p:cNvSpPr/>
-          <p:nvPr/>
-        </p:nvSpPr>
-        <p:spPr>
-          <a:xfrm>
-            <a:off x="8641080" y="2514600"/>
-            <a:ext cx="640080" cy="640080"/>
-          </a:xfrm>
-          <a:prstGeom prst="ellipse">
-            <a:avLst/>
-          </a:prstGeom>
-          <a:solidFill>
-            <a:srgbClr val="E8A33D"/>
-          </a:solidFill>
-          <a:ln/>
-        </p:spPr>
-        <p:txBody>
-          <a:bodyPr/>
-          <a:lstStyle/>
-          <a:p>
-            <a:endParaRPr lang="en-US"/>
-          </a:p>
-        </p:txBody>
-      </p:sp>
-      <p:sp>
-        <p:nvSpPr>
-          <p:cNvPr id="16" name="Text 14"/>
-          <p:cNvSpPr txBox="1"/>
-          <p:nvPr/>
-        </p:nvSpPr>
-        <p:spPr>
-          <a:xfrm>
-            <a:off x="8641080" y="2514600"/>
-            <a:ext cx="640080" cy="640080"/>
+              <a:rPr lang="en-US" sz="1600" dirty="0">
+                <a:solidFill>
+                  <a:srgbClr val="1B2A4A"/>
+                </a:solidFill>
+                <a:latin typeface="Calibri" pitchFamily="34" charset="0"/>
+                <a:ea typeface="Calibri" pitchFamily="34" charset="-122"/>
+                <a:cs typeface="Calibri" pitchFamily="34" charset="-120"/>
+              </a:rPr>
+              <a:t>log 0.43             = −0.85
+log 0.059 (loved) = −2.83
+log 0.059 (great) = −2.83
+log 0.118 (movie)= −2.14
+</a:t>
+            </a:r>
+            <a:r>
+              <a:rPr lang="en-US" sz="1300" dirty="0">
+                <a:solidFill>
+                  <a:srgbClr val="AEB9CC"/>
+                </a:solidFill>
+                <a:latin typeface="Calibri" pitchFamily="34" charset="0"/>
+                <a:ea typeface="Calibri" pitchFamily="34" charset="-122"/>
+                <a:cs typeface="Calibri" pitchFamily="34" charset="-120"/>
+              </a:rPr>
+              <a:t>—————————————————
+</a:t>
+            </a:r>
+            <a:r>
+              <a:rPr lang="en-US" sz="2200" b="1" dirty="0">
+                <a:solidFill>
+                  <a:srgbClr val="C0453B"/>
+                </a:solidFill>
+                <a:latin typeface="Calibri" pitchFamily="34" charset="0"/>
+                <a:ea typeface="Calibri" pitchFamily="34" charset="-122"/>
+                <a:cs typeface="Calibri" pitchFamily="34" charset="-120"/>
+              </a:rPr>
+              <a:t>log-score = −8.65</a:t>
+            </a:r>
+            <a:endParaRPr lang="en-US" sz="1600" dirty="0"/>
+          </a:p>
+        </p:txBody>
+      </p:sp>
+      <p:sp>
+        <p:nvSpPr>
+          <p:cNvPr id="10" name="Text 8"/>
+          <p:cNvSpPr txBox="1"/>
+          <p:nvPr/>
+        </p:nvSpPr>
+        <p:spPr>
+          <a:xfrm>
+            <a:off x="731520" y="5440680"/>
+            <a:ext cx="10698480" cy="548640"/>
           </a:xfrm>
           <a:prstGeom prst="rect">
             <a:avLst/>
@@ -2931,7 +3091,7 @@
               <a:buNone/>
             </a:pPr>
             <a:r>
-              <a:rPr lang="en-US" sz="2000" b="1" dirty="0">
+              <a:rPr lang="en-US" sz="1600" b="1" i="1" dirty="0">
                 <a:solidFill>
                   <a:srgbClr val="1B2A4A"/>
                 </a:solidFill>
@@ -2939,135 +3099,9 @@
                 <a:ea typeface="Calibri" pitchFamily="34" charset="-122"/>
                 <a:cs typeface="Calibri" pitchFamily="34" charset="-120"/>
               </a:rPr>
-              <a:t>3</a:t>
-            </a:r>
-            <a:endParaRPr lang="en-US" sz="2000" dirty="0"/>
-          </a:p>
-        </p:txBody>
-      </p:sp>
-      <p:sp>
-        <p:nvSpPr>
-          <p:cNvPr id="17" name="Text 15"/>
-          <p:cNvSpPr txBox="1"/>
-          <p:nvPr/>
-        </p:nvSpPr>
-        <p:spPr>
-          <a:xfrm>
-            <a:off x="8641080" y="3337560"/>
-            <a:ext cx="2651760" cy="822960"/>
-          </a:xfrm>
-          <a:prstGeom prst="rect">
-            <a:avLst/>
-          </a:prstGeom>
-          <a:noFill/>
-          <a:ln/>
-        </p:spPr>
-        <p:txBody>
-          <a:bodyPr wrap="square" lIns="0" tIns="0" rIns="0" bIns="0" rtlCol="0" anchor="ctr"/>
-          <a:lstStyle/>
-          <a:p>
-            <a:pPr marL="0" indent="0">
-              <a:lnSpc>
-                <a:spcPct val="100000"/>
-              </a:lnSpc>
-              <a:buNone/>
-            </a:pPr>
-            <a:r>
-              <a:rPr lang="en-US" sz="1700" b="1" dirty="0">
-                <a:solidFill>
-                  <a:srgbClr val="1B2A4A"/>
-                </a:solidFill>
-                <a:latin typeface="Calibri" pitchFamily="34" charset="0"/>
-                <a:ea typeface="Calibri" pitchFamily="34" charset="-122"/>
-                <a:cs typeface="Calibri" pitchFamily="34" charset="-120"/>
-              </a:rPr>
-              <a:t>Only knows its vocabulary</a:t>
-            </a:r>
-            <a:endParaRPr lang="en-US" sz="1700" dirty="0"/>
-          </a:p>
-        </p:txBody>
-      </p:sp>
-      <p:sp>
-        <p:nvSpPr>
-          <p:cNvPr id="18" name="Text 16"/>
-          <p:cNvSpPr txBox="1"/>
-          <p:nvPr/>
-        </p:nvSpPr>
-        <p:spPr>
-          <a:xfrm>
-            <a:off x="8641080" y="4069080"/>
-            <a:ext cx="2651760" cy="868680"/>
-          </a:xfrm>
-          <a:prstGeom prst="rect">
-            <a:avLst/>
-          </a:prstGeom>
-          <a:noFill/>
-          <a:ln/>
-        </p:spPr>
-        <p:txBody>
-          <a:bodyPr wrap="square" lIns="0" tIns="0" rIns="0" bIns="0" rtlCol="0" anchor="ctr"/>
-          <a:lstStyle/>
-          <a:p>
-            <a:pPr marL="0" indent="0">
-              <a:lnSpc>
-                <a:spcPct val="115000"/>
-              </a:lnSpc>
-              <a:buNone/>
-            </a:pPr>
-            <a:r>
-              <a:rPr lang="en-US" sz="1400" dirty="0">
-                <a:solidFill>
-                  <a:srgbClr val="5B667A"/>
-                </a:solidFill>
-                <a:latin typeface="Calibri" pitchFamily="34" charset="0"/>
-                <a:ea typeface="Calibri" pitchFamily="34" charset="-122"/>
-                <a:cs typeface="Calibri" pitchFamily="34" charset="-120"/>
-              </a:rPr>
-              <a:t>a word never seen in training carries no signal at all.</a:t>
-            </a:r>
-            <a:endParaRPr lang="en-US" sz="1400" dirty="0"/>
-          </a:p>
-        </p:txBody>
-      </p:sp>
-      <p:sp>
-        <p:nvSpPr>
-          <p:cNvPr id="19" name="Text 17"/>
-          <p:cNvSpPr txBox="1"/>
-          <p:nvPr/>
-        </p:nvSpPr>
-        <p:spPr>
-          <a:xfrm>
-            <a:off x="731520" y="5257800"/>
-            <a:ext cx="10698480" cy="640080"/>
-          </a:xfrm>
-          <a:prstGeom prst="rect">
-            <a:avLst/>
-          </a:prstGeom>
-          <a:noFill/>
-          <a:ln/>
-        </p:spPr>
-        <p:txBody>
-          <a:bodyPr wrap="square" lIns="0" tIns="0" rIns="0" bIns="0" rtlCol="0" anchor="ctr"/>
-          <a:lstStyle/>
-          <a:p>
-            <a:pPr marL="0" indent="0" algn="ctr">
-              <a:lnSpc>
-                <a:spcPct val="110000"/>
-              </a:lnSpc>
-              <a:buNone/>
-            </a:pPr>
-            <a:r>
-              <a:rPr lang="en-US" sz="1500" i="1" dirty="0">
-                <a:solidFill>
-                  <a:srgbClr val="1B2A4A"/>
-                </a:solidFill>
-                <a:latin typeface="Calibri" pitchFamily="34" charset="0"/>
-                <a:ea typeface="Calibri" pitchFamily="34" charset="-122"/>
-                <a:cs typeface="Calibri" pitchFamily="34" charset="-120"/>
-              </a:rPr>
-              <a:t>Modern models (transformers) fix these by reading words in context — but they're doing a fancier version of the same job you just did by hand.</a:t>
-            </a:r>
-            <a:endParaRPr lang="en-US" sz="1500" dirty="0"/>
+              <a:t>−5.68  is bigger than  −8.65,  so POSITIVE wins — the very same verdict, reached by adding four tidy numbers.</a:t>
+            </a:r>
+            <a:endParaRPr lang="en-US" sz="1600" dirty="0"/>
           </a:p>
         </p:txBody>
       </p:sp>
@@ -3079,9 +3113,1911 @@
 </p:sld>
 </file>
 
-<file path=ppt/slides/slide14.xml><?xml version="1.0" encoding="utf-8"?>
+<file path=ppt/slides/slide15.xml><?xml version="1.0" encoding="utf-8"?>
 <p:sld xmlns:a="http://schemas.openxmlformats.org/drawingml/2006/main" xmlns:r="http://schemas.openxmlformats.org/officeDocument/2006/relationships" xmlns:p="http://schemas.openxmlformats.org/presentationml/2006/main">
-  <p:cSld name="Slide 14">
+  <p:cSld name="Slide 15">
+    <p:bg>
+      <p:bgPr>
+        <a:solidFill>
+          <a:srgbClr val="F4F6FB"/>
+        </a:solidFill>
+        <a:effectLst/>
+      </p:bgPr>
+    </p:bg>
+    <p:spTree>
+      <p:nvGrpSpPr>
+        <p:cNvPr id="1" name=""/>
+        <p:cNvGrpSpPr/>
+        <p:nvPr/>
+      </p:nvGrpSpPr>
+      <p:grpSpPr>
+        <a:xfrm>
+          <a:off x="0" y="0"/>
+          <a:ext cx="0" cy="0"/>
+          <a:chOff x="0" y="0"/>
+          <a:chExt cx="0" cy="0"/>
+        </a:xfrm>
+      </p:grpSpPr>
+      <p:sp>
+        <p:nvSpPr>
+          <p:cNvPr id="2" name="Text 0"/>
+          <p:cNvSpPr txBox="1"/>
+          <p:nvPr/>
+        </p:nvSpPr>
+        <p:spPr>
+          <a:xfrm>
+            <a:off x="731520" y="548640"/>
+            <a:ext cx="10698480" cy="731520"/>
+          </a:xfrm>
+          <a:prstGeom prst="rect">
+            <a:avLst/>
+          </a:prstGeom>
+          <a:noFill/>
+          <a:ln/>
+        </p:spPr>
+        <p:txBody>
+          <a:bodyPr wrap="square" lIns="0" tIns="0" rIns="0" bIns="0" rtlCol="0" anchor="ctr"/>
+          <a:lstStyle/>
+          <a:p>
+            <a:pPr marL="0" indent="0">
+              <a:buNone/>
+            </a:pPr>
+            <a:r>
+              <a:rPr lang="en-US" sz="3400" b="1" dirty="0">
+                <a:solidFill>
+                  <a:srgbClr val="1B2A4A"/>
+                </a:solidFill>
+                <a:latin typeface="Cambria" pitchFamily="34" charset="0"/>
+                <a:ea typeface="Cambria" pitchFamily="34" charset="-122"/>
+                <a:cs typeface="Cambria" pitchFamily="34" charset="-120"/>
+              </a:rPr>
+              <a:t>Why this is safe to do</a:t>
+            </a:r>
+            <a:endParaRPr lang="en-US" sz="3400" dirty="0"/>
+          </a:p>
+        </p:txBody>
+      </p:sp>
+      <p:sp>
+        <p:nvSpPr>
+          <p:cNvPr id="3" name="Shape 1"/>
+          <p:cNvSpPr/>
+          <p:nvPr/>
+        </p:nvSpPr>
+        <p:spPr>
+          <a:xfrm>
+            <a:off x="731520" y="2103120"/>
+            <a:ext cx="3291840" cy="2971800"/>
+          </a:xfrm>
+          <a:prstGeom prst="roundRect">
+            <a:avLst>
+              <a:gd name="adj" fmla="val 3692"/>
+            </a:avLst>
+          </a:prstGeom>
+          <a:solidFill>
+            <a:srgbClr val="FFFFFF"/>
+          </a:solidFill>
+          <a:ln/>
+          <a:effectLst>
+            <a:outerShdw blurRad="76200" dist="25400" dir="5400000" algn="bl" rotWithShape="0">
+              <a:srgbClr val="9AA6BC">
+                <a:alpha val="50000"/>
+              </a:srgbClr>
+            </a:outerShdw>
+          </a:effectLst>
+        </p:spPr>
+        <p:txBody>
+          <a:bodyPr/>
+          <a:lstStyle/>
+          <a:p>
+            <a:endParaRPr lang="en-US"/>
+          </a:p>
+        </p:txBody>
+      </p:sp>
+      <p:sp>
+        <p:nvSpPr>
+          <p:cNvPr id="4" name="Shape 2"/>
+          <p:cNvSpPr/>
+          <p:nvPr/>
+        </p:nvSpPr>
+        <p:spPr>
+          <a:xfrm>
+            <a:off x="1051560" y="2468880"/>
+            <a:ext cx="640080" cy="640080"/>
+          </a:xfrm>
+          <a:prstGeom prst="ellipse">
+            <a:avLst/>
+          </a:prstGeom>
+          <a:solidFill>
+            <a:srgbClr val="E8A33D"/>
+          </a:solidFill>
+          <a:ln/>
+        </p:spPr>
+        <p:txBody>
+          <a:bodyPr/>
+          <a:lstStyle/>
+          <a:p>
+            <a:endParaRPr lang="en-US"/>
+          </a:p>
+        </p:txBody>
+      </p:sp>
+      <p:sp>
+        <p:nvSpPr>
+          <p:cNvPr id="5" name="Text 3"/>
+          <p:cNvSpPr txBox="1"/>
+          <p:nvPr/>
+        </p:nvSpPr>
+        <p:spPr>
+          <a:xfrm>
+            <a:off x="1051560" y="2468880"/>
+            <a:ext cx="640080" cy="640080"/>
+          </a:xfrm>
+          <a:prstGeom prst="rect">
+            <a:avLst/>
+          </a:prstGeom>
+          <a:noFill/>
+          <a:ln/>
+        </p:spPr>
+        <p:txBody>
+          <a:bodyPr wrap="square" lIns="0" tIns="0" rIns="0" bIns="0" rtlCol="0" anchor="ctr"/>
+          <a:lstStyle/>
+          <a:p>
+            <a:pPr marL="0" indent="0" algn="ctr">
+              <a:buNone/>
+            </a:pPr>
+            <a:r>
+              <a:rPr lang="en-US" sz="2000" b="1" dirty="0">
+                <a:solidFill>
+                  <a:srgbClr val="1B2A4A"/>
+                </a:solidFill>
+                <a:latin typeface="Calibri" pitchFamily="34" charset="0"/>
+                <a:ea typeface="Calibri" pitchFamily="34" charset="-122"/>
+                <a:cs typeface="Calibri" pitchFamily="34" charset="-120"/>
+              </a:rPr>
+              <a:t>1</a:t>
+            </a:r>
+            <a:endParaRPr lang="en-US" sz="2000" dirty="0"/>
+          </a:p>
+        </p:txBody>
+      </p:sp>
+      <p:sp>
+        <p:nvSpPr>
+          <p:cNvPr id="6" name="Text 4"/>
+          <p:cNvSpPr txBox="1"/>
+          <p:nvPr/>
+        </p:nvSpPr>
+        <p:spPr>
+          <a:xfrm>
+            <a:off x="1051560" y="3291840"/>
+            <a:ext cx="2651760" cy="822960"/>
+          </a:xfrm>
+          <a:prstGeom prst="rect">
+            <a:avLst/>
+          </a:prstGeom>
+          <a:noFill/>
+          <a:ln/>
+        </p:spPr>
+        <p:txBody>
+          <a:bodyPr wrap="square" lIns="0" tIns="0" rIns="0" bIns="0" rtlCol="0" anchor="ctr"/>
+          <a:lstStyle/>
+          <a:p>
+            <a:pPr marL="0" indent="0">
+              <a:lnSpc>
+                <a:spcPct val="100000"/>
+              </a:lnSpc>
+              <a:buNone/>
+            </a:pPr>
+            <a:r>
+              <a:rPr lang="en-US" sz="1700" b="1" dirty="0">
+                <a:solidFill>
+                  <a:srgbClr val="1B2A4A"/>
+                </a:solidFill>
+                <a:latin typeface="Calibri" pitchFamily="34" charset="0"/>
+                <a:ea typeface="Calibri" pitchFamily="34" charset="-122"/>
+                <a:cs typeface="Calibri" pitchFamily="34" charset="-120"/>
+              </a:rPr>
+              <a:t>Order is preserved</a:t>
+            </a:r>
+            <a:endParaRPr lang="en-US" sz="1700" dirty="0"/>
+          </a:p>
+        </p:txBody>
+      </p:sp>
+      <p:sp>
+        <p:nvSpPr>
+          <p:cNvPr id="7" name="Text 5"/>
+          <p:cNvSpPr txBox="1"/>
+          <p:nvPr/>
+        </p:nvSpPr>
+        <p:spPr>
+          <a:xfrm>
+            <a:off x="1051560" y="3977640"/>
+            <a:ext cx="2651760" cy="960120"/>
+          </a:xfrm>
+          <a:prstGeom prst="rect">
+            <a:avLst/>
+          </a:prstGeom>
+          <a:noFill/>
+          <a:ln/>
+        </p:spPr>
+        <p:txBody>
+          <a:bodyPr wrap="square" lIns="0" tIns="0" rIns="0" bIns="0" rtlCol="0" anchor="ctr"/>
+          <a:lstStyle/>
+          <a:p>
+            <a:pPr marL="0" indent="0">
+              <a:lnSpc>
+                <a:spcPct val="115000"/>
+              </a:lnSpc>
+              <a:buNone/>
+            </a:pPr>
+            <a:r>
+              <a:rPr lang="en-US" sz="1400" dirty="0">
+                <a:solidFill>
+                  <a:srgbClr val="5B667A"/>
+                </a:solidFill>
+                <a:latin typeface="Calibri" pitchFamily="34" charset="0"/>
+                <a:ea typeface="Calibri" pitchFamily="34" charset="-122"/>
+                <a:cs typeface="Calibri" pitchFamily="34" charset="-120"/>
+              </a:rPr>
+              <a:t>log always grows with its input, so the bigger product still has the bigger log. The winner never changes.</a:t>
+            </a:r>
+            <a:endParaRPr lang="en-US" sz="1400" dirty="0"/>
+          </a:p>
+        </p:txBody>
+      </p:sp>
+      <p:sp>
+        <p:nvSpPr>
+          <p:cNvPr id="8" name="Shape 6"/>
+          <p:cNvSpPr/>
+          <p:nvPr/>
+        </p:nvSpPr>
+        <p:spPr>
+          <a:xfrm>
+            <a:off x="4526280" y="2103120"/>
+            <a:ext cx="3291840" cy="2971800"/>
+          </a:xfrm>
+          <a:prstGeom prst="roundRect">
+            <a:avLst>
+              <a:gd name="adj" fmla="val 3692"/>
+            </a:avLst>
+          </a:prstGeom>
+          <a:solidFill>
+            <a:srgbClr val="FFFFFF"/>
+          </a:solidFill>
+          <a:ln/>
+          <a:effectLst>
+            <a:outerShdw blurRad="76200" dist="25400" dir="5400000" algn="bl" rotWithShape="0">
+              <a:srgbClr val="9AA6BC">
+                <a:alpha val="50000"/>
+              </a:srgbClr>
+            </a:outerShdw>
+          </a:effectLst>
+        </p:spPr>
+        <p:txBody>
+          <a:bodyPr/>
+          <a:lstStyle/>
+          <a:p>
+            <a:endParaRPr lang="en-US"/>
+          </a:p>
+        </p:txBody>
+      </p:sp>
+      <p:sp>
+        <p:nvSpPr>
+          <p:cNvPr id="9" name="Shape 7"/>
+          <p:cNvSpPr/>
+          <p:nvPr/>
+        </p:nvSpPr>
+        <p:spPr>
+          <a:xfrm>
+            <a:off x="4846320" y="2468880"/>
+            <a:ext cx="640080" cy="640080"/>
+          </a:xfrm>
+          <a:prstGeom prst="ellipse">
+            <a:avLst/>
+          </a:prstGeom>
+          <a:solidFill>
+            <a:srgbClr val="E8A33D"/>
+          </a:solidFill>
+          <a:ln/>
+        </p:spPr>
+        <p:txBody>
+          <a:bodyPr/>
+          <a:lstStyle/>
+          <a:p>
+            <a:endParaRPr lang="en-US"/>
+          </a:p>
+        </p:txBody>
+      </p:sp>
+      <p:sp>
+        <p:nvSpPr>
+          <p:cNvPr id="10" name="Text 8"/>
+          <p:cNvSpPr txBox="1"/>
+          <p:nvPr/>
+        </p:nvSpPr>
+        <p:spPr>
+          <a:xfrm>
+            <a:off x="4846320" y="2468880"/>
+            <a:ext cx="640080" cy="640080"/>
+          </a:xfrm>
+          <a:prstGeom prst="rect">
+            <a:avLst/>
+          </a:prstGeom>
+          <a:noFill/>
+          <a:ln/>
+        </p:spPr>
+        <p:txBody>
+          <a:bodyPr wrap="square" lIns="0" tIns="0" rIns="0" bIns="0" rtlCol="0" anchor="ctr"/>
+          <a:lstStyle/>
+          <a:p>
+            <a:pPr marL="0" indent="0" algn="ctr">
+              <a:buNone/>
+            </a:pPr>
+            <a:r>
+              <a:rPr lang="en-US" sz="2000" b="1" dirty="0">
+                <a:solidFill>
+                  <a:srgbClr val="1B2A4A"/>
+                </a:solidFill>
+                <a:latin typeface="Calibri" pitchFamily="34" charset="0"/>
+                <a:ea typeface="Calibri" pitchFamily="34" charset="-122"/>
+                <a:cs typeface="Calibri" pitchFamily="34" charset="-120"/>
+              </a:rPr>
+              <a:t>2</a:t>
+            </a:r>
+            <a:endParaRPr lang="en-US" sz="2000" dirty="0"/>
+          </a:p>
+        </p:txBody>
+      </p:sp>
+      <p:sp>
+        <p:nvSpPr>
+          <p:cNvPr id="11" name="Text 9"/>
+          <p:cNvSpPr txBox="1"/>
+          <p:nvPr/>
+        </p:nvSpPr>
+        <p:spPr>
+          <a:xfrm>
+            <a:off x="4846320" y="3291840"/>
+            <a:ext cx="2651760" cy="822960"/>
+          </a:xfrm>
+          <a:prstGeom prst="rect">
+            <a:avLst/>
+          </a:prstGeom>
+          <a:noFill/>
+          <a:ln/>
+        </p:spPr>
+        <p:txBody>
+          <a:bodyPr wrap="square" lIns="0" tIns="0" rIns="0" bIns="0" rtlCol="0" anchor="ctr"/>
+          <a:lstStyle/>
+          <a:p>
+            <a:pPr marL="0" indent="0">
+              <a:lnSpc>
+                <a:spcPct val="100000"/>
+              </a:lnSpc>
+              <a:buNone/>
+            </a:pPr>
+            <a:r>
+              <a:rPr lang="en-US" sz="1700" b="1" dirty="0">
+                <a:solidFill>
+                  <a:srgbClr val="1B2A4A"/>
+                </a:solidFill>
+                <a:latin typeface="Calibri" pitchFamily="34" charset="0"/>
+                <a:ea typeface="Calibri" pitchFamily="34" charset="-122"/>
+                <a:cs typeface="Calibri" pitchFamily="34" charset="-120"/>
+              </a:rPr>
+              <a:t>No underflow</a:t>
+            </a:r>
+            <a:endParaRPr lang="en-US" sz="1700" dirty="0"/>
+          </a:p>
+        </p:txBody>
+      </p:sp>
+      <p:sp>
+        <p:nvSpPr>
+          <p:cNvPr id="12" name="Text 10"/>
+          <p:cNvSpPr txBox="1"/>
+          <p:nvPr/>
+        </p:nvSpPr>
+        <p:spPr>
+          <a:xfrm>
+            <a:off x="4846320" y="3977640"/>
+            <a:ext cx="2651760" cy="960120"/>
+          </a:xfrm>
+          <a:prstGeom prst="rect">
+            <a:avLst/>
+          </a:prstGeom>
+          <a:noFill/>
+          <a:ln/>
+        </p:spPr>
+        <p:txBody>
+          <a:bodyPr wrap="square" lIns="0" tIns="0" rIns="0" bIns="0" rtlCol="0" anchor="ctr"/>
+          <a:lstStyle/>
+          <a:p>
+            <a:pPr marL="0" indent="0">
+              <a:lnSpc>
+                <a:spcPct val="115000"/>
+              </a:lnSpc>
+              <a:buNone/>
+            </a:pPr>
+            <a:r>
+              <a:rPr lang="en-US" sz="1400" dirty="0">
+                <a:solidFill>
+                  <a:srgbClr val="5B667A"/>
+                </a:solidFill>
+                <a:latin typeface="Calibri" pitchFamily="34" charset="0"/>
+                <a:ea typeface="Calibri" pitchFamily="34" charset="-122"/>
+                <a:cs typeface="Calibri" pitchFamily="34" charset="-120"/>
+              </a:rPr>
+              <a:t>adding numbers like −5.68 stays in comfortable range, even over hundreds of words. Nothing rounds to zero.</a:t>
+            </a:r>
+            <a:endParaRPr lang="en-US" sz="1400" dirty="0"/>
+          </a:p>
+        </p:txBody>
+      </p:sp>
+      <p:sp>
+        <p:nvSpPr>
+          <p:cNvPr id="13" name="Shape 11"/>
+          <p:cNvSpPr/>
+          <p:nvPr/>
+        </p:nvSpPr>
+        <p:spPr>
+          <a:xfrm>
+            <a:off x="8321040" y="2103120"/>
+            <a:ext cx="3291840" cy="2971800"/>
+          </a:xfrm>
+          <a:prstGeom prst="roundRect">
+            <a:avLst>
+              <a:gd name="adj" fmla="val 3692"/>
+            </a:avLst>
+          </a:prstGeom>
+          <a:solidFill>
+            <a:srgbClr val="FFFFFF"/>
+          </a:solidFill>
+          <a:ln/>
+          <a:effectLst>
+            <a:outerShdw blurRad="76200" dist="25400" dir="5400000" algn="bl" rotWithShape="0">
+              <a:srgbClr val="9AA6BC">
+                <a:alpha val="50000"/>
+              </a:srgbClr>
+            </a:outerShdw>
+          </a:effectLst>
+        </p:spPr>
+        <p:txBody>
+          <a:bodyPr/>
+          <a:lstStyle/>
+          <a:p>
+            <a:endParaRPr lang="en-US"/>
+          </a:p>
+        </p:txBody>
+      </p:sp>
+      <p:sp>
+        <p:nvSpPr>
+          <p:cNvPr id="14" name="Shape 12"/>
+          <p:cNvSpPr/>
+          <p:nvPr/>
+        </p:nvSpPr>
+        <p:spPr>
+          <a:xfrm>
+            <a:off x="8641080" y="2468880"/>
+            <a:ext cx="640080" cy="640080"/>
+          </a:xfrm>
+          <a:prstGeom prst="ellipse">
+            <a:avLst/>
+          </a:prstGeom>
+          <a:solidFill>
+            <a:srgbClr val="E8A33D"/>
+          </a:solidFill>
+          <a:ln/>
+        </p:spPr>
+        <p:txBody>
+          <a:bodyPr/>
+          <a:lstStyle/>
+          <a:p>
+            <a:endParaRPr lang="en-US"/>
+          </a:p>
+        </p:txBody>
+      </p:sp>
+      <p:sp>
+        <p:nvSpPr>
+          <p:cNvPr id="15" name="Text 13"/>
+          <p:cNvSpPr txBox="1"/>
+          <p:nvPr/>
+        </p:nvSpPr>
+        <p:spPr>
+          <a:xfrm>
+            <a:off x="8641080" y="2468880"/>
+            <a:ext cx="640080" cy="640080"/>
+          </a:xfrm>
+          <a:prstGeom prst="rect">
+            <a:avLst/>
+          </a:prstGeom>
+          <a:noFill/>
+          <a:ln/>
+        </p:spPr>
+        <p:txBody>
+          <a:bodyPr wrap="square" lIns="0" tIns="0" rIns="0" bIns="0" rtlCol="0" anchor="ctr"/>
+          <a:lstStyle/>
+          <a:p>
+            <a:pPr marL="0" indent="0" algn="ctr">
+              <a:buNone/>
+            </a:pPr>
+            <a:r>
+              <a:rPr lang="en-US" sz="2000" b="1" dirty="0">
+                <a:solidFill>
+                  <a:srgbClr val="1B2A4A"/>
+                </a:solidFill>
+                <a:latin typeface="Calibri" pitchFamily="34" charset="0"/>
+                <a:ea typeface="Calibri" pitchFamily="34" charset="-122"/>
+                <a:cs typeface="Calibri" pitchFamily="34" charset="-120"/>
+              </a:rPr>
+              <a:t>3</a:t>
+            </a:r>
+            <a:endParaRPr lang="en-US" sz="2000" dirty="0"/>
+          </a:p>
+        </p:txBody>
+      </p:sp>
+      <p:sp>
+        <p:nvSpPr>
+          <p:cNvPr id="16" name="Text 14"/>
+          <p:cNvSpPr txBox="1"/>
+          <p:nvPr/>
+        </p:nvSpPr>
+        <p:spPr>
+          <a:xfrm>
+            <a:off x="8641080" y="3291840"/>
+            <a:ext cx="2651760" cy="822960"/>
+          </a:xfrm>
+          <a:prstGeom prst="rect">
+            <a:avLst/>
+          </a:prstGeom>
+          <a:noFill/>
+          <a:ln/>
+        </p:spPr>
+        <p:txBody>
+          <a:bodyPr wrap="square" lIns="0" tIns="0" rIns="0" bIns="0" rtlCol="0" anchor="ctr"/>
+          <a:lstStyle/>
+          <a:p>
+            <a:pPr marL="0" indent="0">
+              <a:lnSpc>
+                <a:spcPct val="100000"/>
+              </a:lnSpc>
+              <a:buNone/>
+            </a:pPr>
+            <a:r>
+              <a:rPr lang="en-US" sz="1700" b="1" dirty="0">
+                <a:solidFill>
+                  <a:srgbClr val="1B2A4A"/>
+                </a:solidFill>
+                <a:latin typeface="Calibri" pitchFamily="34" charset="0"/>
+                <a:ea typeface="Calibri" pitchFamily="34" charset="-122"/>
+                <a:cs typeface="Calibri" pitchFamily="34" charset="-120"/>
+              </a:rPr>
+              <a:t>Comparing is enough</a:t>
+            </a:r>
+            <a:endParaRPr lang="en-US" sz="1700" dirty="0"/>
+          </a:p>
+        </p:txBody>
+      </p:sp>
+      <p:sp>
+        <p:nvSpPr>
+          <p:cNvPr id="17" name="Text 15"/>
+          <p:cNvSpPr txBox="1"/>
+          <p:nvPr/>
+        </p:nvSpPr>
+        <p:spPr>
+          <a:xfrm>
+            <a:off x="8641080" y="3977640"/>
+            <a:ext cx="2651760" cy="960120"/>
+          </a:xfrm>
+          <a:prstGeom prst="rect">
+            <a:avLst/>
+          </a:prstGeom>
+          <a:noFill/>
+          <a:ln/>
+        </p:spPr>
+        <p:txBody>
+          <a:bodyPr wrap="square" lIns="0" tIns="0" rIns="0" bIns="0" rtlCol="0" anchor="ctr"/>
+          <a:lstStyle/>
+          <a:p>
+            <a:pPr marL="0" indent="0">
+              <a:lnSpc>
+                <a:spcPct val="115000"/>
+              </a:lnSpc>
+              <a:buNone/>
+            </a:pPr>
+            <a:r>
+              <a:rPr lang="en-US" sz="1400" dirty="0">
+                <a:solidFill>
+                  <a:srgbClr val="5B667A"/>
+                </a:solidFill>
+                <a:latin typeface="Calibri" pitchFamily="34" charset="0"/>
+                <a:ea typeface="Calibri" pitchFamily="34" charset="-122"/>
+                <a:cs typeface="Calibri" pitchFamily="34" charset="-120"/>
+              </a:rPr>
+              <a:t>to pick a class you just compare log-scores. Only if you need the actual probability do you exponentiate back.</a:t>
+            </a:r>
+            <a:endParaRPr lang="en-US" sz="1400" dirty="0"/>
+          </a:p>
+        </p:txBody>
+      </p:sp>
+      <p:sp>
+        <p:nvSpPr>
+          <p:cNvPr id="18" name="Text 16"/>
+          <p:cNvSpPr txBox="1"/>
+          <p:nvPr/>
+        </p:nvSpPr>
+        <p:spPr>
+          <a:xfrm>
+            <a:off x="731520" y="5257800"/>
+            <a:ext cx="10698480" cy="640080"/>
+          </a:xfrm>
+          <a:prstGeom prst="rect">
+            <a:avLst/>
+          </a:prstGeom>
+          <a:noFill/>
+          <a:ln/>
+        </p:spPr>
+        <p:txBody>
+          <a:bodyPr wrap="square" lIns="0" tIns="0" rIns="0" bIns="0" rtlCol="0" anchor="ctr"/>
+          <a:lstStyle/>
+          <a:p>
+            <a:pPr marL="0" indent="0" algn="ctr">
+              <a:lnSpc>
+                <a:spcPct val="110000"/>
+              </a:lnSpc>
+              <a:buNone/>
+            </a:pPr>
+            <a:r>
+              <a:rPr lang="en-US" sz="1500" i="1" dirty="0">
+                <a:solidFill>
+                  <a:srgbClr val="1B2A4A"/>
+                </a:solidFill>
+                <a:latin typeface="Calibri" pitchFamily="34" charset="0"/>
+                <a:ea typeface="Calibri" pitchFamily="34" charset="-122"/>
+                <a:cs typeface="Calibri" pitchFamily="34" charset="-120"/>
+              </a:rPr>
+              <a:t>The gap here was 8.65 − 5.68 = 2.97, and e²⁹⁷ ≈ 20 — so positive is about 20× more likely. The log gap even tells you by how much.</a:t>
+            </a:r>
+            <a:endParaRPr lang="en-US" sz="1500" dirty="0"/>
+          </a:p>
+        </p:txBody>
+      </p:sp>
+    </p:spTree>
+  </p:cSld>
+  <p:clrMapOvr>
+    <a:masterClrMapping/>
+  </p:clrMapOvr>
+</p:sld>
+</file>
+
+<file path=ppt/slides/slide16.xml><?xml version="1.0" encoding="utf-8"?>
+<p:sld xmlns:a="http://schemas.openxmlformats.org/drawingml/2006/main" xmlns:r="http://schemas.openxmlformats.org/officeDocument/2006/relationships" xmlns:p="http://schemas.openxmlformats.org/presentationml/2006/main">
+  <p:cSld name="Slide 16">
+    <p:bg>
+      <p:bgPr>
+        <a:solidFill>
+          <a:srgbClr val="1B2A4A"/>
+        </a:solidFill>
+        <a:effectLst/>
+      </p:bgPr>
+    </p:bg>
+    <p:spTree>
+      <p:nvGrpSpPr>
+        <p:cNvPr id="1" name=""/>
+        <p:cNvGrpSpPr/>
+        <p:nvPr/>
+      </p:nvGrpSpPr>
+      <p:grpSpPr>
+        <a:xfrm>
+          <a:off x="0" y="0"/>
+          <a:ext cx="0" cy="0"/>
+          <a:chOff x="0" y="0"/>
+          <a:chExt cx="0" cy="0"/>
+        </a:xfrm>
+      </p:grpSpPr>
+      <p:sp>
+        <p:nvSpPr>
+          <p:cNvPr id="2" name="Text 0"/>
+          <p:cNvSpPr txBox="1"/>
+          <p:nvPr/>
+        </p:nvSpPr>
+        <p:spPr>
+          <a:xfrm>
+            <a:off x="822960" y="548640"/>
+            <a:ext cx="10515600" cy="731520"/>
+          </a:xfrm>
+          <a:prstGeom prst="rect">
+            <a:avLst/>
+          </a:prstGeom>
+          <a:noFill/>
+          <a:ln/>
+        </p:spPr>
+        <p:txBody>
+          <a:bodyPr wrap="square" lIns="0" tIns="0" rIns="0" bIns="0" rtlCol="0" anchor="ctr"/>
+          <a:lstStyle/>
+          <a:p>
+            <a:pPr marL="0" indent="0">
+              <a:buNone/>
+            </a:pPr>
+            <a:r>
+              <a:rPr lang="en-US" sz="3400" b="1" dirty="0">
+                <a:solidFill>
+                  <a:srgbClr val="E8A33D"/>
+                </a:solidFill>
+                <a:latin typeface="Cambria" pitchFamily="34" charset="0"/>
+                <a:ea typeface="Cambria" pitchFamily="34" charset="-122"/>
+                <a:cs typeface="Cambria" pitchFamily="34" charset="-120"/>
+              </a:rPr>
+              <a:t>The whole pipeline</a:t>
+            </a:r>
+            <a:endParaRPr lang="en-US" sz="3400" dirty="0"/>
+          </a:p>
+        </p:txBody>
+      </p:sp>
+      <p:sp>
+        <p:nvSpPr>
+          <p:cNvPr id="3" name="Shape 1"/>
+          <p:cNvSpPr/>
+          <p:nvPr/>
+        </p:nvSpPr>
+        <p:spPr>
+          <a:xfrm>
+            <a:off x="822960" y="1600200"/>
+            <a:ext cx="5074920" cy="4206240"/>
+          </a:xfrm>
+          <a:prstGeom prst="roundRect">
+            <a:avLst>
+              <a:gd name="adj" fmla="val 2609"/>
+            </a:avLst>
+          </a:prstGeom>
+          <a:solidFill>
+            <a:srgbClr val="24365C"/>
+          </a:solidFill>
+          <a:ln/>
+        </p:spPr>
+        <p:txBody>
+          <a:bodyPr/>
+          <a:lstStyle/>
+          <a:p>
+            <a:endParaRPr lang="en-US"/>
+          </a:p>
+        </p:txBody>
+      </p:sp>
+      <p:sp>
+        <p:nvSpPr>
+          <p:cNvPr id="4" name="Text 2"/>
+          <p:cNvSpPr txBox="1"/>
+          <p:nvPr/>
+        </p:nvSpPr>
+        <p:spPr>
+          <a:xfrm>
+            <a:off x="1143000" y="1828800"/>
+            <a:ext cx="4572000" cy="457200"/>
+          </a:xfrm>
+          <a:prstGeom prst="rect">
+            <a:avLst/>
+          </a:prstGeom>
+          <a:noFill/>
+          <a:ln/>
+        </p:spPr>
+        <p:txBody>
+          <a:bodyPr wrap="square" lIns="0" tIns="0" rIns="0" bIns="0" rtlCol="0" anchor="ctr"/>
+          <a:lstStyle/>
+          <a:p>
+            <a:pPr marL="0" indent="0">
+              <a:buNone/>
+            </a:pPr>
+            <a:r>
+              <a:rPr lang="en-US" sz="2000" b="1" dirty="0">
+                <a:solidFill>
+                  <a:srgbClr val="2B6CB0"/>
+                </a:solidFill>
+                <a:latin typeface="Calibri" pitchFamily="34" charset="0"/>
+                <a:ea typeface="Calibri" pitchFamily="34" charset="-122"/>
+                <a:cs typeface="Calibri" pitchFamily="34" charset="-120"/>
+              </a:rPr>
+              <a:t>TRAINING   (count)</a:t>
+            </a:r>
+            <a:endParaRPr lang="en-US" sz="2000" dirty="0"/>
+          </a:p>
+        </p:txBody>
+      </p:sp>
+      <p:sp>
+        <p:nvSpPr>
+          <p:cNvPr id="5" name="Text 3"/>
+          <p:cNvSpPr txBox="1"/>
+          <p:nvPr/>
+        </p:nvSpPr>
+        <p:spPr>
+          <a:xfrm>
+            <a:off x="1143000" y="2423160"/>
+            <a:ext cx="4572000" cy="3200400"/>
+          </a:xfrm>
+          <a:prstGeom prst="rect">
+            <a:avLst/>
+          </a:prstGeom>
+          <a:noFill/>
+          <a:ln/>
+        </p:spPr>
+        <p:txBody>
+          <a:bodyPr wrap="square" lIns="0" tIns="0" rIns="0" bIns="0" rtlCol="0" anchor="ctr"/>
+          <a:lstStyle/>
+          <a:p>
+            <a:pPr marL="0" indent="0">
+              <a:lnSpc>
+                <a:spcPct val="125000"/>
+              </a:lnSpc>
+              <a:buNone/>
+            </a:pPr>
+            <a:r>
+              <a:rPr lang="en-US" sz="1600" b="1" dirty="0">
+                <a:solidFill>
+                  <a:srgbClr val="FFFFFF"/>
+                </a:solidFill>
+                <a:latin typeface="Calibri" pitchFamily="34" charset="0"/>
+                <a:ea typeface="Calibri" pitchFamily="34" charset="-122"/>
+                <a:cs typeface="Calibri" pitchFamily="34" charset="-120"/>
+              </a:rPr>
+              <a:t>Count reviews per label
+</a:t>
+            </a:r>
+            <a:r>
+              <a:rPr lang="en-US" sz="1600" dirty="0">
+                <a:solidFill>
+                  <a:srgbClr val="AEB9CC"/>
+                </a:solidFill>
+                <a:latin typeface="Calibri" pitchFamily="34" charset="0"/>
+                <a:ea typeface="Calibri" pitchFamily="34" charset="-122"/>
+                <a:cs typeface="Calibri" pitchFamily="34" charset="-120"/>
+              </a:rPr>
+              <a:t>→  </a:t>
+            </a:r>
+            <a:r>
+              <a:rPr lang="en-US" sz="1600" b="1" dirty="0">
+                <a:solidFill>
+                  <a:srgbClr val="E8A33D"/>
+                </a:solidFill>
+                <a:latin typeface="Calibri" pitchFamily="34" charset="0"/>
+                <a:ea typeface="Calibri" pitchFamily="34" charset="-122"/>
+                <a:cs typeface="Calibri" pitchFamily="34" charset="-120"/>
+              </a:rPr>
+              <a:t>prior</a:t>
+            </a:r>
+            <a:r>
+              <a:rPr lang="en-US" sz="1600" dirty="0">
+                <a:solidFill>
+                  <a:srgbClr val="AEB9CC"/>
+                </a:solidFill>
+                <a:latin typeface="Calibri" pitchFamily="34" charset="0"/>
+                <a:ea typeface="Calibri" pitchFamily="34" charset="-122"/>
+                <a:cs typeface="Calibri" pitchFamily="34" charset="-120"/>
+              </a:rPr>
+              <a:t>  P(class)
+</a:t>
+            </a:r>
+            <a:r>
+              <a:rPr lang="en-US" sz="1600" b="1" dirty="0">
+                <a:solidFill>
+                  <a:srgbClr val="FFFFFF"/>
+                </a:solidFill>
+                <a:latin typeface="Calibri" pitchFamily="34" charset="0"/>
+                <a:ea typeface="Calibri" pitchFamily="34" charset="-122"/>
+                <a:cs typeface="Calibri" pitchFamily="34" charset="-120"/>
+              </a:rPr>
+              <a:t>Count words per label,
+add-1 smooth
+</a:t>
+            </a:r>
+            <a:r>
+              <a:rPr lang="en-US" sz="1600" dirty="0">
+                <a:solidFill>
+                  <a:srgbClr val="AEB9CC"/>
+                </a:solidFill>
+                <a:latin typeface="Calibri" pitchFamily="34" charset="0"/>
+                <a:ea typeface="Calibri" pitchFamily="34" charset="-122"/>
+                <a:cs typeface="Calibri" pitchFamily="34" charset="-120"/>
+              </a:rPr>
+              <a:t>→  </a:t>
+            </a:r>
+            <a:r>
+              <a:rPr lang="en-US" sz="1600" b="1" dirty="0">
+                <a:solidFill>
+                  <a:srgbClr val="E8A33D"/>
+                </a:solidFill>
+                <a:latin typeface="Calibri" pitchFamily="34" charset="0"/>
+                <a:ea typeface="Calibri" pitchFamily="34" charset="-122"/>
+                <a:cs typeface="Calibri" pitchFamily="34" charset="-120"/>
+              </a:rPr>
+              <a:t>likelihood</a:t>
+            </a:r>
+            <a:r>
+              <a:rPr lang="en-US" sz="1600" dirty="0">
+                <a:solidFill>
+                  <a:srgbClr val="AEB9CC"/>
+                </a:solidFill>
+                <a:latin typeface="Calibri" pitchFamily="34" charset="0"/>
+                <a:ea typeface="Calibri" pitchFamily="34" charset="-122"/>
+                <a:cs typeface="Calibri" pitchFamily="34" charset="-120"/>
+              </a:rPr>
+              <a:t>  P(word|class)</a:t>
+            </a:r>
+            <a:endParaRPr lang="en-US" sz="1600" dirty="0"/>
+          </a:p>
+        </p:txBody>
+      </p:sp>
+      <p:sp>
+        <p:nvSpPr>
+          <p:cNvPr id="6" name="Shape 4"/>
+          <p:cNvSpPr/>
+          <p:nvPr/>
+        </p:nvSpPr>
+        <p:spPr>
+          <a:xfrm>
+            <a:off x="6263640" y="1600200"/>
+            <a:ext cx="5074920" cy="4206240"/>
+          </a:xfrm>
+          <a:prstGeom prst="roundRect">
+            <a:avLst>
+              <a:gd name="adj" fmla="val 2609"/>
+            </a:avLst>
+          </a:prstGeom>
+          <a:solidFill>
+            <a:srgbClr val="24365C"/>
+          </a:solidFill>
+          <a:ln/>
+        </p:spPr>
+        <p:txBody>
+          <a:bodyPr/>
+          <a:lstStyle/>
+          <a:p>
+            <a:endParaRPr lang="en-US"/>
+          </a:p>
+        </p:txBody>
+      </p:sp>
+      <p:sp>
+        <p:nvSpPr>
+          <p:cNvPr id="7" name="Text 5"/>
+          <p:cNvSpPr txBox="1"/>
+          <p:nvPr/>
+        </p:nvSpPr>
+        <p:spPr>
+          <a:xfrm>
+            <a:off x="6583680" y="1828800"/>
+            <a:ext cx="4572000" cy="457200"/>
+          </a:xfrm>
+          <a:prstGeom prst="rect">
+            <a:avLst/>
+          </a:prstGeom>
+          <a:noFill/>
+          <a:ln/>
+        </p:spPr>
+        <p:txBody>
+          <a:bodyPr wrap="square" lIns="0" tIns="0" rIns="0" bIns="0" rtlCol="0" anchor="ctr"/>
+          <a:lstStyle/>
+          <a:p>
+            <a:pPr marL="0" indent="0">
+              <a:buNone/>
+            </a:pPr>
+            <a:r>
+              <a:rPr lang="en-US" sz="2000" b="1" dirty="0">
+                <a:solidFill>
+                  <a:srgbClr val="E8A33D"/>
+                </a:solidFill>
+                <a:latin typeface="Calibri" pitchFamily="34" charset="0"/>
+                <a:ea typeface="Calibri" pitchFamily="34" charset="-122"/>
+                <a:cs typeface="Calibri" pitchFamily="34" charset="-120"/>
+              </a:rPr>
+              <a:t>PREDICTING   (Bayes)</a:t>
+            </a:r>
+            <a:endParaRPr lang="en-US" sz="2000" dirty="0"/>
+          </a:p>
+        </p:txBody>
+      </p:sp>
+      <p:sp>
+        <p:nvSpPr>
+          <p:cNvPr id="8" name="Text 6"/>
+          <p:cNvSpPr txBox="1"/>
+          <p:nvPr/>
+        </p:nvSpPr>
+        <p:spPr>
+          <a:xfrm>
+            <a:off x="6583680" y="2423160"/>
+            <a:ext cx="4572000" cy="3291840"/>
+          </a:xfrm>
+          <a:prstGeom prst="rect">
+            <a:avLst/>
+          </a:prstGeom>
+          <a:noFill/>
+          <a:ln/>
+        </p:spPr>
+        <p:txBody>
+          <a:bodyPr wrap="square" lIns="0" tIns="0" rIns="0" bIns="0" rtlCol="0" anchor="ctr"/>
+          <a:lstStyle/>
+          <a:p>
+            <a:pPr marL="0" indent="0">
+              <a:lnSpc>
+                <a:spcPct val="120000"/>
+              </a:lnSpc>
+              <a:buNone/>
+            </a:pPr>
+            <a:r>
+              <a:rPr lang="en-US" sz="1600" b="1" dirty="0">
+                <a:solidFill>
+                  <a:srgbClr val="FFFFFF"/>
+                </a:solidFill>
+                <a:latin typeface="Calibri" pitchFamily="34" charset="0"/>
+                <a:ea typeface="Calibri" pitchFamily="34" charset="-122"/>
+                <a:cs typeface="Calibri" pitchFamily="34" charset="-120"/>
+              </a:rPr>
+              <a:t>For each class:  prior × ∏ likelihoods
+</a:t>
+            </a:r>
+            <a:r>
+              <a:rPr lang="en-US" sz="1600" dirty="0">
+                <a:solidFill>
+                  <a:srgbClr val="AEB9CC"/>
+                </a:solidFill>
+                <a:latin typeface="Calibri" pitchFamily="34" charset="0"/>
+                <a:ea typeface="Calibri" pitchFamily="34" charset="-122"/>
+                <a:cs typeface="Calibri" pitchFamily="34" charset="-120"/>
+              </a:rPr>
+              <a:t>→  a score per class
+</a:t>
+            </a:r>
+            <a:r>
+              <a:rPr lang="en-US" sz="1600" b="1" dirty="0">
+                <a:solidFill>
+                  <a:srgbClr val="FFFFFF"/>
+                </a:solidFill>
+                <a:latin typeface="Calibri" pitchFamily="34" charset="0"/>
+                <a:ea typeface="Calibri" pitchFamily="34" charset="-122"/>
+                <a:cs typeface="Calibri" pitchFamily="34" charset="-120"/>
+              </a:rPr>
+              <a:t>Add the scores
+</a:t>
+            </a:r>
+            <a:r>
+              <a:rPr lang="en-US" sz="1600" dirty="0">
+                <a:solidFill>
+                  <a:srgbClr val="AEB9CC"/>
+                </a:solidFill>
+                <a:latin typeface="Calibri" pitchFamily="34" charset="0"/>
+                <a:ea typeface="Calibri" pitchFamily="34" charset="-122"/>
+                <a:cs typeface="Calibri" pitchFamily="34" charset="-120"/>
+              </a:rPr>
+              <a:t>→  </a:t>
+            </a:r>
+            <a:r>
+              <a:rPr lang="en-US" sz="1600" b="1" dirty="0">
+                <a:solidFill>
+                  <a:srgbClr val="E8A33D"/>
+                </a:solidFill>
+                <a:latin typeface="Calibri" pitchFamily="34" charset="0"/>
+                <a:ea typeface="Calibri" pitchFamily="34" charset="-122"/>
+                <a:cs typeface="Calibri" pitchFamily="34" charset="-120"/>
+              </a:rPr>
+              <a:t>evidence</a:t>
+            </a:r>
+            <a:r>
+              <a:rPr lang="en-US" sz="1600" dirty="0">
+                <a:solidFill>
+                  <a:srgbClr val="AEB9CC"/>
+                </a:solidFill>
+                <a:latin typeface="Calibri" pitchFamily="34" charset="0"/>
+                <a:ea typeface="Calibri" pitchFamily="34" charset="-122"/>
+                <a:cs typeface="Calibri" pitchFamily="34" charset="-120"/>
+              </a:rPr>
+              <a:t>  P(review)
+</a:t>
+            </a:r>
+            <a:r>
+              <a:rPr lang="en-US" sz="1600" b="1" dirty="0">
+                <a:solidFill>
+                  <a:srgbClr val="FFFFFF"/>
+                </a:solidFill>
+                <a:latin typeface="Calibri" pitchFamily="34" charset="0"/>
+                <a:ea typeface="Calibri" pitchFamily="34" charset="-122"/>
+                <a:cs typeface="Calibri" pitchFamily="34" charset="-120"/>
+              </a:rPr>
+              <a:t>Divide score by evidence
+</a:t>
+            </a:r>
+            <a:r>
+              <a:rPr lang="en-US" sz="1600" dirty="0">
+                <a:solidFill>
+                  <a:srgbClr val="AEB9CC"/>
+                </a:solidFill>
+                <a:latin typeface="Calibri" pitchFamily="34" charset="0"/>
+                <a:ea typeface="Calibri" pitchFamily="34" charset="-122"/>
+                <a:cs typeface="Calibri" pitchFamily="34" charset="-120"/>
+              </a:rPr>
+              <a:t>→  </a:t>
+            </a:r>
+            <a:r>
+              <a:rPr lang="en-US" sz="1600" b="1" dirty="0">
+                <a:solidFill>
+                  <a:srgbClr val="E8A33D"/>
+                </a:solidFill>
+                <a:latin typeface="Calibri" pitchFamily="34" charset="0"/>
+                <a:ea typeface="Calibri" pitchFamily="34" charset="-122"/>
+                <a:cs typeface="Calibri" pitchFamily="34" charset="-120"/>
+              </a:rPr>
+              <a:t>posterior</a:t>
+            </a:r>
+            <a:r>
+              <a:rPr lang="en-US" sz="1600" dirty="0">
+                <a:solidFill>
+                  <a:srgbClr val="AEB9CC"/>
+                </a:solidFill>
+                <a:latin typeface="Calibri" pitchFamily="34" charset="0"/>
+                <a:ea typeface="Calibri" pitchFamily="34" charset="-122"/>
+                <a:cs typeface="Calibri" pitchFamily="34" charset="-120"/>
+              </a:rPr>
+              <a:t>  → pick the bigger</a:t>
+            </a:r>
+            <a:endParaRPr lang="en-US" sz="1600" dirty="0"/>
+          </a:p>
+        </p:txBody>
+      </p:sp>
+      <p:sp>
+        <p:nvSpPr>
+          <p:cNvPr id="9" name="Text 7"/>
+          <p:cNvSpPr txBox="1"/>
+          <p:nvPr/>
+        </p:nvSpPr>
+        <p:spPr>
+          <a:xfrm>
+            <a:off x="822960" y="5989320"/>
+            <a:ext cx="10515600" cy="457200"/>
+          </a:xfrm>
+          <a:prstGeom prst="rect">
+            <a:avLst/>
+          </a:prstGeom>
+          <a:noFill/>
+          <a:ln/>
+        </p:spPr>
+        <p:txBody>
+          <a:bodyPr wrap="square" lIns="0" tIns="0" rIns="0" bIns="0" rtlCol="0" anchor="ctr"/>
+          <a:lstStyle/>
+          <a:p>
+            <a:pPr marL="0" indent="0" algn="ctr">
+              <a:buNone/>
+            </a:pPr>
+            <a:r>
+              <a:rPr lang="en-US" sz="1500" i="1" dirty="0">
+                <a:solidFill>
+                  <a:srgbClr val="AEB9CC"/>
+                </a:solidFill>
+                <a:latin typeface="Calibri" pitchFamily="34" charset="0"/>
+                <a:ea typeface="Calibri" pitchFamily="34" charset="-122"/>
+                <a:cs typeface="Calibri" pitchFamily="34" charset="-120"/>
+              </a:rPr>
+              <a:t>Every Bayes word — prior, likelihood, evidence, posterior — shows up exactly once. That's the entire method.</a:t>
+            </a:r>
+            <a:endParaRPr lang="en-US" sz="1500" dirty="0"/>
+          </a:p>
+        </p:txBody>
+      </p:sp>
+    </p:spTree>
+  </p:cSld>
+  <p:clrMapOvr>
+    <a:masterClrMapping/>
+  </p:clrMapOvr>
+</p:sld>
+</file>
+
+<file path=ppt/slides/slide17.xml><?xml version="1.0" encoding="utf-8"?>
+<p:sld xmlns:a="http://schemas.openxmlformats.org/drawingml/2006/main" xmlns:r="http://schemas.openxmlformats.org/officeDocument/2006/relationships" xmlns:p="http://schemas.openxmlformats.org/presentationml/2006/main">
+  <p:cSld name="Slide 17">
+    <p:bg>
+      <p:bgPr>
+        <a:solidFill>
+          <a:srgbClr val="F4F6FB"/>
+        </a:solidFill>
+        <a:effectLst/>
+      </p:bgPr>
+    </p:bg>
+    <p:spTree>
+      <p:nvGrpSpPr>
+        <p:cNvPr id="1" name=""/>
+        <p:cNvGrpSpPr/>
+        <p:nvPr/>
+      </p:nvGrpSpPr>
+      <p:grpSpPr>
+        <a:xfrm>
+          <a:off x="0" y="0"/>
+          <a:ext cx="0" cy="0"/>
+          <a:chOff x="0" y="0"/>
+          <a:chExt cx="0" cy="0"/>
+        </a:xfrm>
+      </p:grpSpPr>
+      <p:sp>
+        <p:nvSpPr>
+          <p:cNvPr id="2" name="Text 0"/>
+          <p:cNvSpPr txBox="1"/>
+          <p:nvPr/>
+        </p:nvSpPr>
+        <p:spPr>
+          <a:xfrm>
+            <a:off x="731520" y="502920"/>
+            <a:ext cx="10698480" cy="731520"/>
+          </a:xfrm>
+          <a:prstGeom prst="rect">
+            <a:avLst/>
+          </a:prstGeom>
+          <a:noFill/>
+          <a:ln/>
+        </p:spPr>
+        <p:txBody>
+          <a:bodyPr wrap="square" lIns="0" tIns="0" rIns="0" bIns="0" rtlCol="0" anchor="ctr"/>
+          <a:lstStyle/>
+          <a:p>
+            <a:pPr marL="0" indent="0">
+              <a:buNone/>
+            </a:pPr>
+            <a:r>
+              <a:rPr lang="en-US" sz="3200" b="1" dirty="0">
+                <a:solidFill>
+                  <a:srgbClr val="1B2A4A"/>
+                </a:solidFill>
+                <a:latin typeface="Cambria" pitchFamily="34" charset="0"/>
+                <a:ea typeface="Cambria" pitchFamily="34" charset="-122"/>
+                <a:cs typeface="Cambria" pitchFamily="34" charset="-120"/>
+              </a:rPr>
+              <a:t>What you just built — and its limits</a:t>
+            </a:r>
+            <a:endParaRPr lang="en-US" sz="3200" dirty="0"/>
+          </a:p>
+        </p:txBody>
+      </p:sp>
+      <p:sp>
+        <p:nvSpPr>
+          <p:cNvPr id="3" name="Text 1"/>
+          <p:cNvSpPr txBox="1"/>
+          <p:nvPr/>
+        </p:nvSpPr>
+        <p:spPr>
+          <a:xfrm>
+            <a:off x="731520" y="1280160"/>
+            <a:ext cx="10698480" cy="640080"/>
+          </a:xfrm>
+          <a:prstGeom prst="rect">
+            <a:avLst/>
+          </a:prstGeom>
+          <a:noFill/>
+          <a:ln/>
+        </p:spPr>
+        <p:txBody>
+          <a:bodyPr wrap="square" lIns="0" tIns="0" rIns="0" bIns="0" rtlCol="0" anchor="ctr"/>
+          <a:lstStyle/>
+          <a:p>
+            <a:pPr marL="0" indent="0">
+              <a:lnSpc>
+                <a:spcPct val="110000"/>
+              </a:lnSpc>
+              <a:buNone/>
+            </a:pPr>
+            <a:r>
+              <a:rPr lang="en-US" sz="1600" dirty="0">
+                <a:solidFill>
+                  <a:srgbClr val="5B667A"/>
+                </a:solidFill>
+                <a:latin typeface="Calibri" pitchFamily="34" charset="0"/>
+                <a:ea typeface="Calibri" pitchFamily="34" charset="-122"/>
+                <a:cs typeface="Calibri" pitchFamily="34" charset="-120"/>
+              </a:rPr>
+              <a:t>A real, working classifier from nothing but counts. The same recipe scales to thousands of reviews. But know its blind spots:</a:t>
+            </a:r>
+            <a:endParaRPr lang="en-US" sz="1600" dirty="0"/>
+          </a:p>
+        </p:txBody>
+      </p:sp>
+      <p:sp>
+        <p:nvSpPr>
+          <p:cNvPr id="4" name="Shape 2"/>
+          <p:cNvSpPr/>
+          <p:nvPr/>
+        </p:nvSpPr>
+        <p:spPr>
+          <a:xfrm>
+            <a:off x="731520" y="2148840"/>
+            <a:ext cx="3291840" cy="2880360"/>
+          </a:xfrm>
+          <a:prstGeom prst="roundRect">
+            <a:avLst>
+              <a:gd name="adj" fmla="val 3810"/>
+            </a:avLst>
+          </a:prstGeom>
+          <a:solidFill>
+            <a:srgbClr val="FFFFFF"/>
+          </a:solidFill>
+          <a:ln/>
+          <a:effectLst>
+            <a:outerShdw blurRad="76200" dist="25400" dir="5400000" algn="bl" rotWithShape="0">
+              <a:srgbClr val="9AA6BC">
+                <a:alpha val="50000"/>
+              </a:srgbClr>
+            </a:outerShdw>
+          </a:effectLst>
+        </p:spPr>
+        <p:txBody>
+          <a:bodyPr/>
+          <a:lstStyle/>
+          <a:p>
+            <a:endParaRPr lang="en-US"/>
+          </a:p>
+        </p:txBody>
+      </p:sp>
+      <p:sp>
+        <p:nvSpPr>
+          <p:cNvPr id="5" name="Shape 3"/>
+          <p:cNvSpPr/>
+          <p:nvPr/>
+        </p:nvSpPr>
+        <p:spPr>
+          <a:xfrm>
+            <a:off x="1051560" y="2514600"/>
+            <a:ext cx="640080" cy="640080"/>
+          </a:xfrm>
+          <a:prstGeom prst="ellipse">
+            <a:avLst/>
+          </a:prstGeom>
+          <a:solidFill>
+            <a:srgbClr val="E8A33D"/>
+          </a:solidFill>
+          <a:ln/>
+        </p:spPr>
+        <p:txBody>
+          <a:bodyPr/>
+          <a:lstStyle/>
+          <a:p>
+            <a:endParaRPr lang="en-US"/>
+          </a:p>
+        </p:txBody>
+      </p:sp>
+      <p:sp>
+        <p:nvSpPr>
+          <p:cNvPr id="6" name="Text 4"/>
+          <p:cNvSpPr txBox="1"/>
+          <p:nvPr/>
+        </p:nvSpPr>
+        <p:spPr>
+          <a:xfrm>
+            <a:off x="1051560" y="2514600"/>
+            <a:ext cx="640080" cy="640080"/>
+          </a:xfrm>
+          <a:prstGeom prst="rect">
+            <a:avLst/>
+          </a:prstGeom>
+          <a:noFill/>
+          <a:ln/>
+        </p:spPr>
+        <p:txBody>
+          <a:bodyPr wrap="square" lIns="0" tIns="0" rIns="0" bIns="0" rtlCol="0" anchor="ctr"/>
+          <a:lstStyle/>
+          <a:p>
+            <a:pPr marL="0" indent="0" algn="ctr">
+              <a:buNone/>
+            </a:pPr>
+            <a:r>
+              <a:rPr lang="en-US" sz="2000" b="1" dirty="0">
+                <a:solidFill>
+                  <a:srgbClr val="1B2A4A"/>
+                </a:solidFill>
+                <a:latin typeface="Calibri" pitchFamily="34" charset="0"/>
+                <a:ea typeface="Calibri" pitchFamily="34" charset="-122"/>
+                <a:cs typeface="Calibri" pitchFamily="34" charset="-120"/>
+              </a:rPr>
+              <a:t>1</a:t>
+            </a:r>
+            <a:endParaRPr lang="en-US" sz="2000" dirty="0"/>
+          </a:p>
+        </p:txBody>
+      </p:sp>
+      <p:sp>
+        <p:nvSpPr>
+          <p:cNvPr id="7" name="Text 5"/>
+          <p:cNvSpPr txBox="1"/>
+          <p:nvPr/>
+        </p:nvSpPr>
+        <p:spPr>
+          <a:xfrm>
+            <a:off x="1051560" y="3337560"/>
+            <a:ext cx="2651760" cy="822960"/>
+          </a:xfrm>
+          <a:prstGeom prst="rect">
+            <a:avLst/>
+          </a:prstGeom>
+          <a:noFill/>
+          <a:ln/>
+        </p:spPr>
+        <p:txBody>
+          <a:bodyPr wrap="square" lIns="0" tIns="0" rIns="0" bIns="0" rtlCol="0" anchor="ctr"/>
+          <a:lstStyle/>
+          <a:p>
+            <a:pPr marL="0" indent="0">
+              <a:lnSpc>
+                <a:spcPct val="100000"/>
+              </a:lnSpc>
+              <a:buNone/>
+            </a:pPr>
+            <a:r>
+              <a:rPr lang="en-US" sz="1700" b="1" dirty="0">
+                <a:solidFill>
+                  <a:srgbClr val="1B2A4A"/>
+                </a:solidFill>
+                <a:latin typeface="Calibri" pitchFamily="34" charset="0"/>
+                <a:ea typeface="Calibri" pitchFamily="34" charset="-122"/>
+                <a:cs typeface="Calibri" pitchFamily="34" charset="-120"/>
+              </a:rPr>
+              <a:t>Ignores word order</a:t>
+            </a:r>
+            <a:endParaRPr lang="en-US" sz="1700" dirty="0"/>
+          </a:p>
+        </p:txBody>
+      </p:sp>
+      <p:sp>
+        <p:nvSpPr>
+          <p:cNvPr id="8" name="Text 6"/>
+          <p:cNvSpPr txBox="1"/>
+          <p:nvPr/>
+        </p:nvSpPr>
+        <p:spPr>
+          <a:xfrm>
+            <a:off x="1051560" y="4069080"/>
+            <a:ext cx="2651760" cy="868680"/>
+          </a:xfrm>
+          <a:prstGeom prst="rect">
+            <a:avLst/>
+          </a:prstGeom>
+          <a:noFill/>
+          <a:ln/>
+        </p:spPr>
+        <p:txBody>
+          <a:bodyPr wrap="square" lIns="0" tIns="0" rIns="0" bIns="0" rtlCol="0" anchor="ctr"/>
+          <a:lstStyle/>
+          <a:p>
+            <a:pPr marL="0" indent="0">
+              <a:lnSpc>
+                <a:spcPct val="115000"/>
+              </a:lnSpc>
+              <a:buNone/>
+            </a:pPr>
+            <a:r>
+              <a:rPr lang="en-US" sz="1400" dirty="0">
+                <a:solidFill>
+                  <a:srgbClr val="5B667A"/>
+                </a:solidFill>
+                <a:latin typeface="Calibri" pitchFamily="34" charset="0"/>
+                <a:ea typeface="Calibri" pitchFamily="34" charset="-122"/>
+                <a:cs typeface="Calibri" pitchFamily="34" charset="-120"/>
+              </a:rPr>
+              <a:t>“not good” and “good” look the same in a bag of words. Negation is invisible.</a:t>
+            </a:r>
+            <a:endParaRPr lang="en-US" sz="1400" dirty="0"/>
+          </a:p>
+        </p:txBody>
+      </p:sp>
+      <p:sp>
+        <p:nvSpPr>
+          <p:cNvPr id="9" name="Shape 7"/>
+          <p:cNvSpPr/>
+          <p:nvPr/>
+        </p:nvSpPr>
+        <p:spPr>
+          <a:xfrm>
+            <a:off x="4526280" y="2148840"/>
+            <a:ext cx="3291840" cy="2880360"/>
+          </a:xfrm>
+          <a:prstGeom prst="roundRect">
+            <a:avLst>
+              <a:gd name="adj" fmla="val 3810"/>
+            </a:avLst>
+          </a:prstGeom>
+          <a:solidFill>
+            <a:srgbClr val="FFFFFF"/>
+          </a:solidFill>
+          <a:ln/>
+          <a:effectLst>
+            <a:outerShdw blurRad="76200" dist="25400" dir="5400000" algn="bl" rotWithShape="0">
+              <a:srgbClr val="9AA6BC">
+                <a:alpha val="50000"/>
+              </a:srgbClr>
+            </a:outerShdw>
+          </a:effectLst>
+        </p:spPr>
+        <p:txBody>
+          <a:bodyPr/>
+          <a:lstStyle/>
+          <a:p>
+            <a:endParaRPr lang="en-US"/>
+          </a:p>
+        </p:txBody>
+      </p:sp>
+      <p:sp>
+        <p:nvSpPr>
+          <p:cNvPr id="10" name="Shape 8"/>
+          <p:cNvSpPr/>
+          <p:nvPr/>
+        </p:nvSpPr>
+        <p:spPr>
+          <a:xfrm>
+            <a:off x="4846320" y="2514600"/>
+            <a:ext cx="640080" cy="640080"/>
+          </a:xfrm>
+          <a:prstGeom prst="ellipse">
+            <a:avLst/>
+          </a:prstGeom>
+          <a:solidFill>
+            <a:srgbClr val="E8A33D"/>
+          </a:solidFill>
+          <a:ln/>
+        </p:spPr>
+        <p:txBody>
+          <a:bodyPr/>
+          <a:lstStyle/>
+          <a:p>
+            <a:endParaRPr lang="en-US"/>
+          </a:p>
+        </p:txBody>
+      </p:sp>
+      <p:sp>
+        <p:nvSpPr>
+          <p:cNvPr id="11" name="Text 9"/>
+          <p:cNvSpPr txBox="1"/>
+          <p:nvPr/>
+        </p:nvSpPr>
+        <p:spPr>
+          <a:xfrm>
+            <a:off x="4846320" y="2514600"/>
+            <a:ext cx="640080" cy="640080"/>
+          </a:xfrm>
+          <a:prstGeom prst="rect">
+            <a:avLst/>
+          </a:prstGeom>
+          <a:noFill/>
+          <a:ln/>
+        </p:spPr>
+        <p:txBody>
+          <a:bodyPr wrap="square" lIns="0" tIns="0" rIns="0" bIns="0" rtlCol="0" anchor="ctr"/>
+          <a:lstStyle/>
+          <a:p>
+            <a:pPr marL="0" indent="0" algn="ctr">
+              <a:buNone/>
+            </a:pPr>
+            <a:r>
+              <a:rPr lang="en-US" sz="2000" b="1" dirty="0">
+                <a:solidFill>
+                  <a:srgbClr val="1B2A4A"/>
+                </a:solidFill>
+                <a:latin typeface="Calibri" pitchFamily="34" charset="0"/>
+                <a:ea typeface="Calibri" pitchFamily="34" charset="-122"/>
+                <a:cs typeface="Calibri" pitchFamily="34" charset="-120"/>
+              </a:rPr>
+              <a:t>2</a:t>
+            </a:r>
+            <a:endParaRPr lang="en-US" sz="2000" dirty="0"/>
+          </a:p>
+        </p:txBody>
+      </p:sp>
+      <p:sp>
+        <p:nvSpPr>
+          <p:cNvPr id="12" name="Text 10"/>
+          <p:cNvSpPr txBox="1"/>
+          <p:nvPr/>
+        </p:nvSpPr>
+        <p:spPr>
+          <a:xfrm>
+            <a:off x="4846320" y="3337560"/>
+            <a:ext cx="2651760" cy="822960"/>
+          </a:xfrm>
+          <a:prstGeom prst="rect">
+            <a:avLst/>
+          </a:prstGeom>
+          <a:noFill/>
+          <a:ln/>
+        </p:spPr>
+        <p:txBody>
+          <a:bodyPr wrap="square" lIns="0" tIns="0" rIns="0" bIns="0" rtlCol="0" anchor="ctr"/>
+          <a:lstStyle/>
+          <a:p>
+            <a:pPr marL="0" indent="0">
+              <a:lnSpc>
+                <a:spcPct val="100000"/>
+              </a:lnSpc>
+              <a:buNone/>
+            </a:pPr>
+            <a:r>
+              <a:rPr lang="en-US" sz="1700" b="1" dirty="0">
+                <a:solidFill>
+                  <a:srgbClr val="1B2A4A"/>
+                </a:solidFill>
+                <a:latin typeface="Calibri" pitchFamily="34" charset="0"/>
+                <a:ea typeface="Calibri" pitchFamily="34" charset="-122"/>
+                <a:cs typeface="Calibri" pitchFamily="34" charset="-120"/>
+              </a:rPr>
+              <a:t>Assumes words are independent</a:t>
+            </a:r>
+            <a:endParaRPr lang="en-US" sz="1700" dirty="0"/>
+          </a:p>
+        </p:txBody>
+      </p:sp>
+      <p:sp>
+        <p:nvSpPr>
+          <p:cNvPr id="13" name="Text 11"/>
+          <p:cNvSpPr txBox="1"/>
+          <p:nvPr/>
+        </p:nvSpPr>
+        <p:spPr>
+          <a:xfrm>
+            <a:off x="4846320" y="4069080"/>
+            <a:ext cx="2651760" cy="868680"/>
+          </a:xfrm>
+          <a:prstGeom prst="rect">
+            <a:avLst/>
+          </a:prstGeom>
+          <a:noFill/>
+          <a:ln/>
+        </p:spPr>
+        <p:txBody>
+          <a:bodyPr wrap="square" lIns="0" tIns="0" rIns="0" bIns="0" rtlCol="0" anchor="ctr"/>
+          <a:lstStyle/>
+          <a:p>
+            <a:pPr marL="0" indent="0">
+              <a:lnSpc>
+                <a:spcPct val="115000"/>
+              </a:lnSpc>
+              <a:buNone/>
+            </a:pPr>
+            <a:r>
+              <a:rPr lang="en-US" sz="1400" dirty="0">
+                <a:solidFill>
+                  <a:srgbClr val="5B667A"/>
+                </a:solidFill>
+                <a:latin typeface="Calibri" pitchFamily="34" charset="0"/>
+                <a:ea typeface="Calibri" pitchFamily="34" charset="-122"/>
+                <a:cs typeface="Calibri" pitchFamily="34" charset="-120"/>
+              </a:rPr>
+              <a:t>the “naive” bet — wrong, but good enough to rank classes correctly.</a:t>
+            </a:r>
+            <a:endParaRPr lang="en-US" sz="1400" dirty="0"/>
+          </a:p>
+        </p:txBody>
+      </p:sp>
+      <p:sp>
+        <p:nvSpPr>
+          <p:cNvPr id="14" name="Shape 12"/>
+          <p:cNvSpPr/>
+          <p:nvPr/>
+        </p:nvSpPr>
+        <p:spPr>
+          <a:xfrm>
+            <a:off x="8321040" y="2148840"/>
+            <a:ext cx="3291840" cy="2880360"/>
+          </a:xfrm>
+          <a:prstGeom prst="roundRect">
+            <a:avLst>
+              <a:gd name="adj" fmla="val 3810"/>
+            </a:avLst>
+          </a:prstGeom>
+          <a:solidFill>
+            <a:srgbClr val="FFFFFF"/>
+          </a:solidFill>
+          <a:ln/>
+          <a:effectLst>
+            <a:outerShdw blurRad="76200" dist="25400" dir="5400000" algn="bl" rotWithShape="0">
+              <a:srgbClr val="9AA6BC">
+                <a:alpha val="50000"/>
+              </a:srgbClr>
+            </a:outerShdw>
+          </a:effectLst>
+        </p:spPr>
+        <p:txBody>
+          <a:bodyPr/>
+          <a:lstStyle/>
+          <a:p>
+            <a:endParaRPr lang="en-US"/>
+          </a:p>
+        </p:txBody>
+      </p:sp>
+      <p:sp>
+        <p:nvSpPr>
+          <p:cNvPr id="15" name="Shape 13"/>
+          <p:cNvSpPr/>
+          <p:nvPr/>
+        </p:nvSpPr>
+        <p:spPr>
+          <a:xfrm>
+            <a:off x="8641080" y="2514600"/>
+            <a:ext cx="640080" cy="640080"/>
+          </a:xfrm>
+          <a:prstGeom prst="ellipse">
+            <a:avLst/>
+          </a:prstGeom>
+          <a:solidFill>
+            <a:srgbClr val="E8A33D"/>
+          </a:solidFill>
+          <a:ln/>
+        </p:spPr>
+        <p:txBody>
+          <a:bodyPr/>
+          <a:lstStyle/>
+          <a:p>
+            <a:endParaRPr lang="en-US"/>
+          </a:p>
+        </p:txBody>
+      </p:sp>
+      <p:sp>
+        <p:nvSpPr>
+          <p:cNvPr id="16" name="Text 14"/>
+          <p:cNvSpPr txBox="1"/>
+          <p:nvPr/>
+        </p:nvSpPr>
+        <p:spPr>
+          <a:xfrm>
+            <a:off x="8641080" y="2514600"/>
+            <a:ext cx="640080" cy="640080"/>
+          </a:xfrm>
+          <a:prstGeom prst="rect">
+            <a:avLst/>
+          </a:prstGeom>
+          <a:noFill/>
+          <a:ln/>
+        </p:spPr>
+        <p:txBody>
+          <a:bodyPr wrap="square" lIns="0" tIns="0" rIns="0" bIns="0" rtlCol="0" anchor="ctr"/>
+          <a:lstStyle/>
+          <a:p>
+            <a:pPr marL="0" indent="0" algn="ctr">
+              <a:buNone/>
+            </a:pPr>
+            <a:r>
+              <a:rPr lang="en-US" sz="2000" b="1" dirty="0">
+                <a:solidFill>
+                  <a:srgbClr val="1B2A4A"/>
+                </a:solidFill>
+                <a:latin typeface="Calibri" pitchFamily="34" charset="0"/>
+                <a:ea typeface="Calibri" pitchFamily="34" charset="-122"/>
+                <a:cs typeface="Calibri" pitchFamily="34" charset="-120"/>
+              </a:rPr>
+              <a:t>3</a:t>
+            </a:r>
+            <a:endParaRPr lang="en-US" sz="2000" dirty="0"/>
+          </a:p>
+        </p:txBody>
+      </p:sp>
+      <p:sp>
+        <p:nvSpPr>
+          <p:cNvPr id="17" name="Text 15"/>
+          <p:cNvSpPr txBox="1"/>
+          <p:nvPr/>
+        </p:nvSpPr>
+        <p:spPr>
+          <a:xfrm>
+            <a:off x="8641080" y="3337560"/>
+            <a:ext cx="2651760" cy="822960"/>
+          </a:xfrm>
+          <a:prstGeom prst="rect">
+            <a:avLst/>
+          </a:prstGeom>
+          <a:noFill/>
+          <a:ln/>
+        </p:spPr>
+        <p:txBody>
+          <a:bodyPr wrap="square" lIns="0" tIns="0" rIns="0" bIns="0" rtlCol="0" anchor="ctr"/>
+          <a:lstStyle/>
+          <a:p>
+            <a:pPr marL="0" indent="0">
+              <a:lnSpc>
+                <a:spcPct val="100000"/>
+              </a:lnSpc>
+              <a:buNone/>
+            </a:pPr>
+            <a:r>
+              <a:rPr lang="en-US" sz="1700" b="1" dirty="0">
+                <a:solidFill>
+                  <a:srgbClr val="1B2A4A"/>
+                </a:solidFill>
+                <a:latin typeface="Calibri" pitchFamily="34" charset="0"/>
+                <a:ea typeface="Calibri" pitchFamily="34" charset="-122"/>
+                <a:cs typeface="Calibri" pitchFamily="34" charset="-120"/>
+              </a:rPr>
+              <a:t>Only knows its vocabulary</a:t>
+            </a:r>
+            <a:endParaRPr lang="en-US" sz="1700" dirty="0"/>
+          </a:p>
+        </p:txBody>
+      </p:sp>
+      <p:sp>
+        <p:nvSpPr>
+          <p:cNvPr id="18" name="Text 16"/>
+          <p:cNvSpPr txBox="1"/>
+          <p:nvPr/>
+        </p:nvSpPr>
+        <p:spPr>
+          <a:xfrm>
+            <a:off x="8641080" y="4069080"/>
+            <a:ext cx="2651760" cy="868680"/>
+          </a:xfrm>
+          <a:prstGeom prst="rect">
+            <a:avLst/>
+          </a:prstGeom>
+          <a:noFill/>
+          <a:ln/>
+        </p:spPr>
+        <p:txBody>
+          <a:bodyPr wrap="square" lIns="0" tIns="0" rIns="0" bIns="0" rtlCol="0" anchor="ctr"/>
+          <a:lstStyle/>
+          <a:p>
+            <a:pPr marL="0" indent="0">
+              <a:lnSpc>
+                <a:spcPct val="115000"/>
+              </a:lnSpc>
+              <a:buNone/>
+            </a:pPr>
+            <a:r>
+              <a:rPr lang="en-US" sz="1400" dirty="0">
+                <a:solidFill>
+                  <a:srgbClr val="5B667A"/>
+                </a:solidFill>
+                <a:latin typeface="Calibri" pitchFamily="34" charset="0"/>
+                <a:ea typeface="Calibri" pitchFamily="34" charset="-122"/>
+                <a:cs typeface="Calibri" pitchFamily="34" charset="-120"/>
+              </a:rPr>
+              <a:t>a word never seen in training carries no signal at all.</a:t>
+            </a:r>
+            <a:endParaRPr lang="en-US" sz="1400" dirty="0"/>
+          </a:p>
+        </p:txBody>
+      </p:sp>
+      <p:sp>
+        <p:nvSpPr>
+          <p:cNvPr id="19" name="Text 17"/>
+          <p:cNvSpPr txBox="1"/>
+          <p:nvPr/>
+        </p:nvSpPr>
+        <p:spPr>
+          <a:xfrm>
+            <a:off x="731520" y="5257800"/>
+            <a:ext cx="10698480" cy="640080"/>
+          </a:xfrm>
+          <a:prstGeom prst="rect">
+            <a:avLst/>
+          </a:prstGeom>
+          <a:noFill/>
+          <a:ln/>
+        </p:spPr>
+        <p:txBody>
+          <a:bodyPr wrap="square" lIns="0" tIns="0" rIns="0" bIns="0" rtlCol="0" anchor="ctr"/>
+          <a:lstStyle/>
+          <a:p>
+            <a:pPr marL="0" indent="0" algn="ctr">
+              <a:lnSpc>
+                <a:spcPct val="110000"/>
+              </a:lnSpc>
+              <a:buNone/>
+            </a:pPr>
+            <a:r>
+              <a:rPr lang="en-US" sz="1500" i="1" dirty="0">
+                <a:solidFill>
+                  <a:srgbClr val="1B2A4A"/>
+                </a:solidFill>
+                <a:latin typeface="Calibri" pitchFamily="34" charset="0"/>
+                <a:ea typeface="Calibri" pitchFamily="34" charset="-122"/>
+                <a:cs typeface="Calibri" pitchFamily="34" charset="-120"/>
+              </a:rPr>
+              <a:t>Modern models (transformers) fix these by reading words in context — but they're doing a fancier version of the same job you just did by hand.</a:t>
+            </a:r>
+            <a:endParaRPr lang="en-US" sz="1500" dirty="0"/>
+          </a:p>
+        </p:txBody>
+      </p:sp>
+    </p:spTree>
+  </p:cSld>
+  <p:clrMapOvr>
+    <a:masterClrMapping/>
+  </p:clrMapOvr>
+</p:sld>
+</file>
+
+<file path=ppt/slides/slide18.xml><?xml version="1.0" encoding="utf-8"?>
+<p:sld xmlns:a="http://schemas.openxmlformats.org/drawingml/2006/main" xmlns:r="http://schemas.openxmlformats.org/officeDocument/2006/relationships" xmlns:p="http://schemas.openxmlformats.org/presentationml/2006/main">
+  <p:cSld name="Slide 18">
     <p:bg>
       <p:bgPr>
         <a:solidFill>

--- a/slides/0016-naive-bayes-for-sentiment.pptx
+++ b/slides/0016-naive-bayes-for-sentiment.pptx
@@ -638,7 +638,7 @@
         </p:nvSpPr>
         <p:spPr>
           <a:xfrm>
-            <a:off x="822960" y="2606040"/>
+            <a:off x="740581" y="2592859"/>
             <a:ext cx="10515600" cy="548640"/>
           </a:xfrm>
           <a:prstGeom prst="rect">
